--- a/claude-code-workshop.pptx
+++ b/claude-code-workshop.pptx
@@ -18,14 +18,26 @@
     <p:sldId id="263" r:id="rId9"/>
     <p:sldId id="264" r:id="rId10"/>
     <p:sldId id="265" r:id="rId11"/>
-    <p:sldId id="266" r:id="rId12"/>
-    <p:sldId id="267" r:id="rId13"/>
-    <p:sldId id="268" r:id="rId14"/>
-    <p:sldId id="269" r:id="rId15"/>
-    <p:sldId id="270" r:id="rId16"/>
-    <p:sldId id="271" r:id="rId17"/>
-    <p:sldId id="272" r:id="rId18"/>
-    <p:sldId id="273" r:id="rId19"/>
+    <p:sldId id="266" r:id="rId100"/>
+    <p:sldId id="267" r:id="rId12"/>
+    <p:sldId id="268" r:id="rId13"/>
+    <p:sldId id="269" r:id="rId14"/>
+    <p:sldId id="270" r:id="rId15"/>
+    <p:sldId id="271" r:id="rId16"/>
+    <p:sldId id="272" r:id="rId17"/>
+    <p:sldId id="273" r:id="rId18"/>
+    <p:sldId id="274" r:id="rId101"/>
+    <p:sldId id="275" r:id="rId102"/>
+    <p:sldId id="276" r:id="rId103"/>
+    <p:sldId id="277" r:id="rId104"/>
+    <p:sldId id="278" r:id="rId105"/>
+    <p:sldId id="279" r:id="rId106"/>
+    <p:sldId id="280" r:id="rId107"/>
+    <p:sldId id="281" r:id="rId108"/>
+    <p:sldId id="282" r:id="rId109"/>
+    <p:sldId id="283" r:id="rId110"/>
+    <p:sldId id="284" r:id="rId111"/>
+    <p:sldId id="285" r:id="rId19"/>
   </p:sldIdLst>
   <p:sldSz cx="9144000" cy="5143500" type="screen16x9"/>
   <p:notesSz cx="5143500" cy="9144000"/>
@@ -8655,7 +8667,7 @@
                 <a:cs typeface="Calibri"/>
                 <a:sym typeface="Calibri"/>
               </a:rPr>
-              <a:t>10 / 18</a:t>
+              <a:t>10 / 30</a:t>
             </a:r>
             <a:endParaRPr sz="900" b="0" i="0" u="none" strike="noStrike" cap="none">
               <a:solidFill>
@@ -9045,7 +9057,7 @@
                 <a:cs typeface="Calibri"/>
                 <a:sym typeface="Calibri"/>
               </a:rPr>
-              <a:t>11 / 18</a:t>
+              <a:t>12 / 30</a:t>
             </a:r>
             <a:endParaRPr sz="900" b="0" i="0" u="none" strike="noStrike" cap="none">
               <a:solidFill>
@@ -11017,7 +11029,7 @@
                 <a:cs typeface="Calibri"/>
                 <a:sym typeface="Calibri"/>
               </a:rPr>
-              <a:t>12 / 18</a:t>
+              <a:t>13 / 30</a:t>
             </a:r>
             <a:endParaRPr sz="900" b="0" i="0" u="none" strike="noStrike" cap="none">
               <a:solidFill>
@@ -14474,7 +14486,7 @@
                 <a:cs typeface="Calibri"/>
                 <a:sym typeface="Calibri"/>
               </a:rPr>
-              <a:t>13 / 18</a:t>
+              <a:t>14 / 30</a:t>
             </a:r>
             <a:endParaRPr sz="900" b="0" i="0" u="none" strike="noStrike" cap="none">
               <a:solidFill>
@@ -16259,7 +16271,7 @@
                 <a:cs typeface="Calibri"/>
                 <a:sym typeface="Calibri"/>
               </a:rPr>
-              <a:t>14 / 18</a:t>
+              <a:t>15 / 30</a:t>
             </a:r>
             <a:endParaRPr sz="900" b="0" i="0" u="none" strike="noStrike" cap="none">
               <a:solidFill>
@@ -18915,7 +18927,7 @@
                 <a:cs typeface="Calibri"/>
                 <a:sym typeface="Calibri"/>
               </a:rPr>
-              <a:t>15 / 18</a:t>
+              <a:t>16 / 30</a:t>
             </a:r>
             <a:endParaRPr sz="900" b="0" i="0" u="none" strike="noStrike" cap="none">
               <a:solidFill>
@@ -21294,7 +21306,7 @@
                 <a:cs typeface="Calibri"/>
                 <a:sym typeface="Calibri"/>
               </a:rPr>
-              <a:t>16 / 18</a:t>
+              <a:t>17 / 30</a:t>
             </a:r>
             <a:endParaRPr sz="900" b="0" i="0" u="none" strike="noStrike" cap="none">
               <a:solidFill>
@@ -23391,7 +23403,7 @@
                 <a:cs typeface="Calibri"/>
                 <a:sym typeface="Calibri"/>
               </a:rPr>
-              <a:t>17 / 18</a:t>
+              <a:t>18 / 30</a:t>
             </a:r>
             <a:endParaRPr sz="900" b="0" i="0" u="none" strike="noStrike" cap="none">
               <a:solidFill>
@@ -24993,7 +25005,7 @@
                 <a:cs typeface="Calibri"/>
                 <a:sym typeface="Calibri"/>
               </a:rPr>
-              <a:t>18 / 18</a:t>
+              <a:t>30 / 30</a:t>
             </a:r>
             <a:endParaRPr sz="900" b="0" i="0" u="none" strike="noStrike" cap="none">
               <a:solidFill>
@@ -25004,6 +25016,437 @@
               <a:cs typeface="Calibri"/>
               <a:sym typeface="Calibri"/>
             </a:endParaRPr>
+          </a:p>
+        </p:txBody>
+      </p:sp>
+    </p:spTree>
+  </p:cSld>
+  <p:clrMapOvr>
+    <a:masterClrMapping/>
+  </p:clrMapOvr>
+</p:sld>
+</file>
+
+<file path=ppt/slides/slide19.xml><?xml version="1.0" encoding="utf-8"?>
+<p:sld xmlns:a="http://schemas.openxmlformats.org/drawingml/2006/main" xmlns:r="http://schemas.openxmlformats.org/officeDocument/2006/relationships" xmlns:p="http://schemas.openxmlformats.org/presentationml/2006/main">
+  <p:cSld>
+    <p:bg>
+      <p:bgPr>
+        <a:solidFill>
+          <a:srgbClr val="0F172A"/>
+        </a:solidFill>
+        <a:effectLst/>
+      </p:bgPr>
+    </p:bg>
+    <p:spTree>
+      <p:nvGrpSpPr>
+        <p:cNvPr id="1" name="Group 1"/>
+        <p:cNvGrpSpPr/>
+        <p:nvPr/>
+      </p:nvGrpSpPr>
+      <p:grpSpPr>
+        <a:xfrm>
+          <a:off x="0" y="0"/>
+          <a:ext cx="0" cy="0"/>
+          <a:chOff x="0" y="0"/>
+          <a:chExt cx="0" cy="0"/>
+        </a:xfrm>
+      </p:grpSpPr>
+      <p:sp>
+        <p:nvSpPr>
+          <p:cNvPr id="2" name="top rule"/>
+          <p:cNvSpPr/>
+          <p:nvPr/>
+        </p:nvSpPr>
+        <p:spPr>
+          <a:xfrm>
+            <a:off x="0" y="0"/>
+            <a:ext cx="9144000" cy="73152"/>
+          </a:xfrm>
+          <a:prstGeom prst="rect">
+            <a:avLst/>
+          </a:prstGeom>
+          <a:solidFill>
+            <a:srgbClr val="38BDF8"/>
+          </a:solidFill>
+          <a:ln>
+            <a:noFill/>
+          </a:ln>
+        </p:spPr>
+        <p:txBody>
+          <a:bodyPr wrap="square" lIns="182880" tIns="121920" rIns="182880" bIns="121920">
+            <a:normAutofit/>
+          </a:bodyPr>
+          <a:lstStyle/>
+          <a:p>
+            <a:pPr marL="0" indent="0">
+              <a:buNone/>
+            </a:pPr>
+            <a:r>
+              <a:rPr lang="de-DE" sz="100">
+                <a:solidFill>
+                  <a:srgbClr val="38BDF8"/>
+                </a:solidFill>
+                <a:latin typeface="Aptos"/>
+                <a:ea typeface="Aptos"/>
+                <a:cs typeface="Aptos"/>
+              </a:rPr>
+              <a:t/>
+            </a:r>
+          </a:p>
+        </p:txBody>
+      </p:sp>
+      <p:sp>
+        <p:nvSpPr>
+          <p:cNvPr id="3" name="kicker"/>
+          <p:cNvSpPr/>
+          <p:nvPr/>
+        </p:nvSpPr>
+        <p:spPr>
+          <a:xfrm>
+            <a:off x="548640" y="438912"/>
+            <a:ext cx="4200000" cy="300000"/>
+          </a:xfrm>
+          <a:prstGeom prst="rect">
+            <a:avLst/>
+          </a:prstGeom>
+          <a:noFill/>
+          <a:ln>
+            <a:noFill/>
+          </a:ln>
+        </p:spPr>
+        <p:txBody>
+          <a:bodyPr wrap="square" lIns="182880" tIns="121920" rIns="182880" bIns="121920">
+            <a:normAutofit/>
+          </a:bodyPr>
+          <a:lstStyle/>
+          <a:p>
+            <a:pPr marL="0" indent="0">
+              <a:buNone/>
+            </a:pPr>
+            <a:r>
+              <a:rPr lang="de-DE" sz="1350" b="1">
+                <a:solidFill>
+                  <a:srgbClr val="38BDF8"/>
+                </a:solidFill>
+                <a:latin typeface="Aptos"/>
+                <a:ea typeface="Aptos"/>
+                <a:cs typeface="Aptos"/>
+              </a:rPr>
+              <a:t>BLOCK 1 - FOUNDATIONS</a:t>
+            </a:r>
+          </a:p>
+        </p:txBody>
+      </p:sp>
+      <p:sp>
+        <p:nvSpPr>
+          <p:cNvPr id="4" name="title"/>
+          <p:cNvSpPr/>
+          <p:nvPr/>
+        </p:nvSpPr>
+        <p:spPr>
+          <a:xfrm>
+            <a:off x="548640" y="770000"/>
+            <a:ext cx="8100000" cy="720000"/>
+          </a:xfrm>
+          <a:prstGeom prst="rect">
+            <a:avLst/>
+          </a:prstGeom>
+          <a:noFill/>
+          <a:ln>
+            <a:noFill/>
+          </a:ln>
+        </p:spPr>
+        <p:txBody>
+          <a:bodyPr wrap="square" lIns="182880" tIns="121920" rIns="182880" bIns="121920">
+            <a:normAutofit/>
+          </a:bodyPr>
+          <a:lstStyle/>
+          <a:p>
+            <a:pPr marL="0" indent="0">
+              <a:buNone/>
+            </a:pPr>
+            <a:r>
+              <a:rPr lang="de-DE" sz="3900" b="1">
+                <a:solidFill>
+                  <a:srgbClr val="F8FAFC"/>
+                </a:solidFill>
+                <a:latin typeface="Aptos"/>
+                <a:ea typeface="Aptos"/>
+                <a:cs typeface="Aptos"/>
+              </a:rPr>
+              <a:t>Cost Engineering</a:t>
+            </a:r>
+          </a:p>
+        </p:txBody>
+      </p:sp>
+      <p:sp>
+        <p:nvSpPr>
+          <p:cNvPr id="5" name="subtitle"/>
+          <p:cNvSpPr/>
+          <p:nvPr/>
+        </p:nvSpPr>
+        <p:spPr>
+          <a:xfrm>
+            <a:off x="548640" y="1510000"/>
+            <a:ext cx="7900000" cy="560000"/>
+          </a:xfrm>
+          <a:prstGeom prst="rect">
+            <a:avLst/>
+          </a:prstGeom>
+          <a:noFill/>
+          <a:ln>
+            <a:noFill/>
+          </a:ln>
+        </p:spPr>
+        <p:txBody>
+          <a:bodyPr wrap="square" lIns="182880" tIns="121920" rIns="182880" bIns="121920">
+            <a:normAutofit/>
+          </a:bodyPr>
+          <a:lstStyle/>
+          <a:p>
+            <a:pPr marL="0" indent="0">
+              <a:buNone/>
+            </a:pPr>
+            <a:r>
+              <a:rPr lang="de-DE" sz="1750">
+                <a:solidFill>
+                  <a:srgbClr val="CBD5E1"/>
+                </a:solidFill>
+                <a:latin typeface="Aptos"/>
+                <a:ea typeface="Aptos"/>
+                <a:cs typeface="Aptos"/>
+              </a:rPr>
+              <a:t>Kosten sind ein Architekturparameter, kein Nachgedanke.</a:t>
+            </a:r>
+          </a:p>
+        </p:txBody>
+      </p:sp>
+      <p:sp>
+        <p:nvSpPr>
+          <p:cNvPr id="10" name="card 1"/>
+          <p:cNvSpPr/>
+          <p:nvPr/>
+        </p:nvSpPr>
+        <p:spPr>
+          <a:xfrm>
+            <a:off x="548640" y="2320000"/>
+            <a:ext cx="2500000" cy="1540000"/>
+          </a:xfrm>
+          <a:prstGeom prst="roundRect">
+            <a:avLst/>
+          </a:prstGeom>
+          <a:solidFill>
+            <a:srgbClr val="1E293B"/>
+          </a:solidFill>
+          <a:ln w="12700">
+            <a:solidFill>
+              <a:srgbClr val="334155"/>
+            </a:solidFill>
+          </a:ln>
+        </p:spPr>
+        <p:txBody>
+          <a:bodyPr wrap="square" lIns="182880" tIns="121920" rIns="182880" bIns="121920">
+            <a:normAutofit/>
+          </a:bodyPr>
+          <a:lstStyle/>
+          <a:p>
+            <a:pPr marL="0" indent="0">
+              <a:buNone/>
+            </a:pPr>
+            <a:r>
+              <a:rPr lang="de-DE" sz="1850" b="1">
+                <a:solidFill>
+                  <a:srgbClr val="F8FAFC"/>
+                </a:solidFill>
+                <a:latin typeface="Aptos"/>
+                <a:ea typeface="Aptos"/>
+                <a:cs typeface="Aptos"/>
+              </a:rPr>
+              <a:t>Budget-Gate</a:t>
+            </a:r>
+          </a:p>
+          <a:p>
+            <a:pPr marL="0" indent="0">
+              <a:buNone/>
+            </a:pPr>
+            <a:r>
+              <a:rPr lang="de-DE" sz="1400">
+                <a:solidFill>
+                  <a:srgbClr val="CBD5E1"/>
+                </a:solidFill>
+                <a:latin typeface="Aptos"/>
+                <a:ea typeface="Aptos"/>
+                <a:cs typeface="Aptos"/>
+              </a:rPr>
+              <a:t>--max-budget-usd und --max-turns begrenzen autonome Loops.</a:t>
+            </a:r>
+          </a:p>
+        </p:txBody>
+      </p:sp>
+      <p:sp>
+        <p:nvSpPr>
+          <p:cNvPr id="11" name="card 2"/>
+          <p:cNvSpPr/>
+          <p:nvPr/>
+        </p:nvSpPr>
+        <p:spPr>
+          <a:xfrm>
+            <a:off x="3308640" y="2320000"/>
+            <a:ext cx="2500000" cy="1540000"/>
+          </a:xfrm>
+          <a:prstGeom prst="roundRect">
+            <a:avLst/>
+          </a:prstGeom>
+          <a:solidFill>
+            <a:srgbClr val="1E293B"/>
+          </a:solidFill>
+          <a:ln w="12700">
+            <a:solidFill>
+              <a:srgbClr val="334155"/>
+            </a:solidFill>
+          </a:ln>
+        </p:spPr>
+        <p:txBody>
+          <a:bodyPr wrap="square" lIns="182880" tIns="121920" rIns="182880" bIns="121920">
+            <a:normAutofit/>
+          </a:bodyPr>
+          <a:lstStyle/>
+          <a:p>
+            <a:pPr marL="0" indent="0">
+              <a:buNone/>
+            </a:pPr>
+            <a:r>
+              <a:rPr lang="de-DE" sz="1850" b="1">
+                <a:solidFill>
+                  <a:srgbClr val="F8FAFC"/>
+                </a:solidFill>
+                <a:latin typeface="Aptos"/>
+                <a:ea typeface="Aptos"/>
+                <a:cs typeface="Aptos"/>
+              </a:rPr>
+              <a:t>Effort-Strategie</a:t>
+            </a:r>
+          </a:p>
+          <a:p>
+            <a:pPr marL="0" indent="0">
+              <a:buNone/>
+            </a:pPr>
+            <a:r>
+              <a:rPr lang="de-DE" sz="1400">
+                <a:solidFill>
+                  <a:srgbClr val="CBD5E1"/>
+                </a:solidFill>
+                <a:latin typeface="Aptos"/>
+                <a:ea typeface="Aptos"/>
+                <a:cs typeface="Aptos"/>
+              </a:rPr>
+              <a:t>low fuer Routine, xhigh fuer Risiko. Nicht alles braucht Maximum.</a:t>
+            </a:r>
+          </a:p>
+        </p:txBody>
+      </p:sp>
+      <p:sp>
+        <p:nvSpPr>
+          <p:cNvPr id="12" name="card 3"/>
+          <p:cNvSpPr/>
+          <p:nvPr/>
+        </p:nvSpPr>
+        <p:spPr>
+          <a:xfrm>
+            <a:off x="6068640" y="2320000"/>
+            <a:ext cx="2500000" cy="1540000"/>
+          </a:xfrm>
+          <a:prstGeom prst="roundRect">
+            <a:avLst/>
+          </a:prstGeom>
+          <a:solidFill>
+            <a:srgbClr val="1E293B"/>
+          </a:solidFill>
+          <a:ln w="12700">
+            <a:solidFill>
+              <a:srgbClr val="334155"/>
+            </a:solidFill>
+          </a:ln>
+        </p:spPr>
+        <p:txBody>
+          <a:bodyPr wrap="square" lIns="182880" tIns="121920" rIns="182880" bIns="121920">
+            <a:normAutofit/>
+          </a:bodyPr>
+          <a:lstStyle/>
+          <a:p>
+            <a:pPr marL="0" indent="0">
+              <a:buNone/>
+            </a:pPr>
+            <a:r>
+              <a:rPr lang="de-DE" sz="1850" b="1">
+                <a:solidFill>
+                  <a:srgbClr val="F8FAFC"/>
+                </a:solidFill>
+                <a:latin typeface="Aptos"/>
+                <a:ea typeface="Aptos"/>
+                <a:cs typeface="Aptos"/>
+              </a:rPr>
+              <a:t>Team-Sicht</a:t>
+            </a:r>
+          </a:p>
+          <a:p>
+            <a:pPr marL="0" indent="0">
+              <a:buNone/>
+            </a:pPr>
+            <a:r>
+              <a:rPr lang="de-DE" sz="1400">
+                <a:solidFill>
+                  <a:srgbClr val="CBD5E1"/>
+                </a:solidFill>
+                <a:latin typeface="Aptos"/>
+                <a:ea typeface="Aptos"/>
+                <a:cs typeface="Aptos"/>
+              </a:rPr>
+              <a:t>/cost lokal, Console fuer Aggregate, klare Tageslimits.</a:t>
+            </a:r>
+          </a:p>
+        </p:txBody>
+      </p:sp>
+      <p:sp>
+        <p:nvSpPr>
+          <p:cNvPr id="30" name="footer"/>
+          <p:cNvSpPr/>
+          <p:nvPr/>
+        </p:nvSpPr>
+        <p:spPr>
+          <a:xfrm>
+            <a:off x="8050000" y="4700000"/>
+            <a:ext cx="760000" cy="260000"/>
+          </a:xfrm>
+          <a:prstGeom prst="rect">
+            <a:avLst/>
+          </a:prstGeom>
+          <a:noFill/>
+          <a:ln>
+            <a:noFill/>
+          </a:ln>
+        </p:spPr>
+        <p:txBody>
+          <a:bodyPr wrap="square" lIns="182880" tIns="121920" rIns="182880" bIns="121920">
+            <a:normAutofit/>
+          </a:bodyPr>
+          <a:lstStyle/>
+          <a:p>
+            <a:pPr marL="0" indent="0">
+              <a:buNone/>
+            </a:pPr>
+            <a:r>
+              <a:rPr lang="de-DE" sz="1100">
+                <a:solidFill>
+                  <a:srgbClr val="94A3B8"/>
+                </a:solidFill>
+                <a:latin typeface="Aptos"/>
+                <a:ea typeface="Aptos"/>
+                <a:cs typeface="Aptos"/>
+              </a:rPr>
+              <a:t>11 / 30</a:t>
+            </a:r>
           </a:p>
         </p:txBody>
       </p:sp>
@@ -26748,7 +27191,7 @@
                 <a:cs typeface="Calibri"/>
                 <a:sym typeface="Calibri"/>
               </a:rPr>
-              <a:t>2 / 18</a:t>
+              <a:t>2 / 30</a:t>
             </a:r>
             <a:endParaRPr sz="900" b="0" i="0" u="none" strike="noStrike" cap="none">
               <a:solidFill>
@@ -26759,6 +27202,4316 @@
               <a:cs typeface="Calibri"/>
               <a:sym typeface="Calibri"/>
             </a:endParaRPr>
+          </a:p>
+        </p:txBody>
+      </p:sp>
+    </p:spTree>
+  </p:cSld>
+  <p:clrMapOvr>
+    <a:masterClrMapping/>
+  </p:clrMapOvr>
+</p:sld>
+</file>
+
+<file path=ppt/slides/slide20.xml><?xml version="1.0" encoding="utf-8"?>
+<p:sld xmlns:a="http://schemas.openxmlformats.org/drawingml/2006/main" xmlns:r="http://schemas.openxmlformats.org/officeDocument/2006/relationships" xmlns:p="http://schemas.openxmlformats.org/presentationml/2006/main">
+  <p:cSld>
+    <p:bg>
+      <p:bgPr>
+        <a:solidFill>
+          <a:srgbClr val="0F172A"/>
+        </a:solidFill>
+        <a:effectLst/>
+      </p:bgPr>
+    </p:bg>
+    <p:spTree>
+      <p:nvGrpSpPr>
+        <p:cNvPr id="1" name="Group 1"/>
+        <p:cNvGrpSpPr/>
+        <p:nvPr/>
+      </p:nvGrpSpPr>
+      <p:grpSpPr>
+        <a:xfrm>
+          <a:off x="0" y="0"/>
+          <a:ext cx="0" cy="0"/>
+          <a:chOff x="0" y="0"/>
+          <a:chExt cx="0" cy="0"/>
+        </a:xfrm>
+      </p:grpSpPr>
+      <p:sp>
+        <p:nvSpPr>
+          <p:cNvPr id="2" name="top rule"/>
+          <p:cNvSpPr/>
+          <p:nvPr/>
+        </p:nvSpPr>
+        <p:spPr>
+          <a:xfrm>
+            <a:off x="0" y="0"/>
+            <a:ext cx="9144000" cy="73152"/>
+          </a:xfrm>
+          <a:prstGeom prst="rect">
+            <a:avLst/>
+          </a:prstGeom>
+          <a:solidFill>
+            <a:srgbClr val="38BDF8"/>
+          </a:solidFill>
+          <a:ln>
+            <a:noFill/>
+          </a:ln>
+        </p:spPr>
+        <p:txBody>
+          <a:bodyPr wrap="square" lIns="182880" tIns="121920" rIns="182880" bIns="121920">
+            <a:normAutofit/>
+          </a:bodyPr>
+          <a:lstStyle/>
+          <a:p>
+            <a:pPr marL="0" indent="0">
+              <a:buNone/>
+            </a:pPr>
+            <a:r>
+              <a:rPr lang="de-DE" sz="100">
+                <a:solidFill>
+                  <a:srgbClr val="38BDF8"/>
+                </a:solidFill>
+                <a:latin typeface="Aptos"/>
+                <a:ea typeface="Aptos"/>
+                <a:cs typeface="Aptos"/>
+              </a:rPr>
+              <a:t/>
+            </a:r>
+          </a:p>
+        </p:txBody>
+      </p:sp>
+      <p:sp>
+        <p:nvSpPr>
+          <p:cNvPr id="3" name="kicker"/>
+          <p:cNvSpPr/>
+          <p:nvPr/>
+        </p:nvSpPr>
+        <p:spPr>
+          <a:xfrm>
+            <a:off x="548640" y="438912"/>
+            <a:ext cx="4200000" cy="300000"/>
+          </a:xfrm>
+          <a:prstGeom prst="rect">
+            <a:avLst/>
+          </a:prstGeom>
+          <a:noFill/>
+          <a:ln>
+            <a:noFill/>
+          </a:ln>
+        </p:spPr>
+        <p:txBody>
+          <a:bodyPr wrap="square" lIns="182880" tIns="121920" rIns="182880" bIns="121920">
+            <a:normAutofit/>
+          </a:bodyPr>
+          <a:lstStyle/>
+          <a:p>
+            <a:pPr marL="0" indent="0">
+              <a:buNone/>
+            </a:pPr>
+            <a:r>
+              <a:rPr lang="de-DE" sz="1350" b="1">
+                <a:solidFill>
+                  <a:srgbClr val="38BDF8"/>
+                </a:solidFill>
+                <a:latin typeface="Aptos"/>
+                <a:ea typeface="Aptos"/>
+                <a:cs typeface="Aptos"/>
+              </a:rPr>
+              <a:t>BLOCK 3 - ADVANCED</a:t>
+            </a:r>
+          </a:p>
+        </p:txBody>
+      </p:sp>
+      <p:sp>
+        <p:nvSpPr>
+          <p:cNvPr id="4" name="title"/>
+          <p:cNvSpPr/>
+          <p:nvPr/>
+        </p:nvSpPr>
+        <p:spPr>
+          <a:xfrm>
+            <a:off x="548640" y="770000"/>
+            <a:ext cx="8100000" cy="720000"/>
+          </a:xfrm>
+          <a:prstGeom prst="rect">
+            <a:avLst/>
+          </a:prstGeom>
+          <a:noFill/>
+          <a:ln>
+            <a:noFill/>
+          </a:ln>
+        </p:spPr>
+        <p:txBody>
+          <a:bodyPr wrap="square" lIns="182880" tIns="121920" rIns="182880" bIns="121920">
+            <a:normAutofit/>
+          </a:bodyPr>
+          <a:lstStyle/>
+          <a:p>
+            <a:pPr marL="0" indent="0">
+              <a:buNone/>
+            </a:pPr>
+            <a:r>
+              <a:rPr lang="de-DE" sz="3900" b="1">
+                <a:solidFill>
+                  <a:srgbClr val="F8FAFC"/>
+                </a:solidFill>
+                <a:latin typeface="Aptos"/>
+                <a:ea typeface="Aptos"/>
+                <a:cs typeface="Aptos"/>
+              </a:rPr>
+              <a:t>Vom Werkzeug zum System</a:t>
+            </a:r>
+          </a:p>
+        </p:txBody>
+      </p:sp>
+      <p:sp>
+        <p:nvSpPr>
+          <p:cNvPr id="5" name="subtitle"/>
+          <p:cNvSpPr/>
+          <p:nvPr/>
+        </p:nvSpPr>
+        <p:spPr>
+          <a:xfrm>
+            <a:off x="548640" y="1510000"/>
+            <a:ext cx="7900000" cy="560000"/>
+          </a:xfrm>
+          <a:prstGeom prst="rect">
+            <a:avLst/>
+          </a:prstGeom>
+          <a:noFill/>
+          <a:ln>
+            <a:noFill/>
+          </a:ln>
+        </p:spPr>
+        <p:txBody>
+          <a:bodyPr wrap="square" lIns="182880" tIns="121920" rIns="182880" bIns="121920">
+            <a:normAutofit/>
+          </a:bodyPr>
+          <a:lstStyle/>
+          <a:p>
+            <a:pPr marL="0" indent="0">
+              <a:buNone/>
+            </a:pPr>
+            <a:r>
+              <a:rPr lang="de-DE" sz="1750">
+                <a:solidFill>
+                  <a:srgbClr val="CBD5E1"/>
+                </a:solidFill>
+                <a:latin typeface="Aptos"/>
+                <a:ea typeface="Aptos"/>
+                <a:cs typeface="Aptos"/>
+              </a:rPr>
+              <a:t>Agents, Multi-Model, Security, Automation, CI/CD und Debugging als zusammenhaengender Workflow.</a:t>
+            </a:r>
+          </a:p>
+        </p:txBody>
+      </p:sp>
+      <p:sp>
+        <p:nvSpPr>
+          <p:cNvPr id="10" name="card 1"/>
+          <p:cNvSpPr/>
+          <p:nvPr/>
+        </p:nvSpPr>
+        <p:spPr>
+          <a:xfrm>
+            <a:off x="548640" y="2320000"/>
+            <a:ext cx="2500000" cy="1540000"/>
+          </a:xfrm>
+          <a:prstGeom prst="roundRect">
+            <a:avLst/>
+          </a:prstGeom>
+          <a:solidFill>
+            <a:srgbClr val="1E293B"/>
+          </a:solidFill>
+          <a:ln w="12700">
+            <a:solidFill>
+              <a:srgbClr val="334155"/>
+            </a:solidFill>
+          </a:ln>
+        </p:spPr>
+        <p:txBody>
+          <a:bodyPr wrap="square" lIns="182880" tIns="121920" rIns="182880" bIns="121920">
+            <a:normAutofit/>
+          </a:bodyPr>
+          <a:lstStyle/>
+          <a:p>
+            <a:pPr marL="0" indent="0">
+              <a:buNone/>
+            </a:pPr>
+            <a:r>
+              <a:rPr lang="de-DE" sz="1850" b="1">
+                <a:solidFill>
+                  <a:srgbClr val="F8FAFC"/>
+                </a:solidFill>
+                <a:latin typeface="Aptos"/>
+                <a:ea typeface="Aptos"/>
+                <a:cs typeface="Aptos"/>
+              </a:rPr>
+              <a:t>1. Orchestrieren</a:t>
+            </a:r>
+          </a:p>
+          <a:p>
+            <a:pPr marL="0" indent="0">
+              <a:buNone/>
+            </a:pPr>
+            <a:r>
+              <a:rPr lang="de-DE" sz="1400">
+                <a:solidFill>
+                  <a:srgbClr val="CBD5E1"/>
+                </a:solidFill>
+                <a:latin typeface="Aptos"/>
+                <a:ea typeface="Aptos"/>
+                <a:cs typeface="Aptos"/>
+              </a:rPr>
+              <a:t>Mehrere Agents arbeiten getrennt, aber mit gemeinsamer Zieldefinition.</a:t>
+            </a:r>
+          </a:p>
+        </p:txBody>
+      </p:sp>
+      <p:sp>
+        <p:nvSpPr>
+          <p:cNvPr id="11" name="card 2"/>
+          <p:cNvSpPr/>
+          <p:nvPr/>
+        </p:nvSpPr>
+        <p:spPr>
+          <a:xfrm>
+            <a:off x="3308640" y="2320000"/>
+            <a:ext cx="2500000" cy="1540000"/>
+          </a:xfrm>
+          <a:prstGeom prst="roundRect">
+            <a:avLst/>
+          </a:prstGeom>
+          <a:solidFill>
+            <a:srgbClr val="1E293B"/>
+          </a:solidFill>
+          <a:ln w="12700">
+            <a:solidFill>
+              <a:srgbClr val="334155"/>
+            </a:solidFill>
+          </a:ln>
+        </p:spPr>
+        <p:txBody>
+          <a:bodyPr wrap="square" lIns="182880" tIns="121920" rIns="182880" bIns="121920">
+            <a:normAutofit/>
+          </a:bodyPr>
+          <a:lstStyle/>
+          <a:p>
+            <a:pPr marL="0" indent="0">
+              <a:buNone/>
+            </a:pPr>
+            <a:r>
+              <a:rPr lang="de-DE" sz="1850" b="1">
+                <a:solidFill>
+                  <a:srgbClr val="F8FAFC"/>
+                </a:solidFill>
+                <a:latin typeface="Aptos"/>
+                <a:ea typeface="Aptos"/>
+                <a:cs typeface="Aptos"/>
+              </a:rPr>
+              <a:t>2. Absichern</a:t>
+            </a:r>
+          </a:p>
+          <a:p>
+            <a:pPr marL="0" indent="0">
+              <a:buNone/>
+            </a:pPr>
+            <a:r>
+              <a:rPr lang="de-DE" sz="1400">
+                <a:solidFill>
+                  <a:srgbClr val="CBD5E1"/>
+                </a:solidFill>
+                <a:latin typeface="Aptos"/>
+                <a:ea typeface="Aptos"/>
+                <a:cs typeface="Aptos"/>
+              </a:rPr>
+              <a:t>Permissions, Sandboxing, Reviews und Audit Trails halten die Kontrolle beim Team.</a:t>
+            </a:r>
+          </a:p>
+        </p:txBody>
+      </p:sp>
+      <p:sp>
+        <p:nvSpPr>
+          <p:cNvPr id="12" name="card 3"/>
+          <p:cNvSpPr/>
+          <p:nvPr/>
+        </p:nvSpPr>
+        <p:spPr>
+          <a:xfrm>
+            <a:off x="6068640" y="2320000"/>
+            <a:ext cx="2500000" cy="1540000"/>
+          </a:xfrm>
+          <a:prstGeom prst="roundRect">
+            <a:avLst/>
+          </a:prstGeom>
+          <a:solidFill>
+            <a:srgbClr val="1E293B"/>
+          </a:solidFill>
+          <a:ln w="12700">
+            <a:solidFill>
+              <a:srgbClr val="334155"/>
+            </a:solidFill>
+          </a:ln>
+        </p:spPr>
+        <p:txBody>
+          <a:bodyPr wrap="square" lIns="182880" tIns="121920" rIns="182880" bIns="121920">
+            <a:normAutofit/>
+          </a:bodyPr>
+          <a:lstStyle/>
+          <a:p>
+            <a:pPr marL="0" indent="0">
+              <a:buNone/>
+            </a:pPr>
+            <a:r>
+              <a:rPr lang="de-DE" sz="1850" b="1">
+                <a:solidFill>
+                  <a:srgbClr val="F8FAFC"/>
+                </a:solidFill>
+                <a:latin typeface="Aptos"/>
+                <a:ea typeface="Aptos"/>
+                <a:cs typeface="Aptos"/>
+              </a:rPr>
+              <a:t>3. Produktivieren</a:t>
+            </a:r>
+          </a:p>
+          <a:p>
+            <a:pPr marL="0" indent="0">
+              <a:buNone/>
+            </a:pPr>
+            <a:r>
+              <a:rPr lang="de-DE" sz="1400">
+                <a:solidFill>
+                  <a:srgbClr val="CBD5E1"/>
+                </a:solidFill>
+                <a:latin typeface="Aptos"/>
+                <a:ea typeface="Aptos"/>
+                <a:cs typeface="Aptos"/>
+              </a:rPr>
+              <a:t>Headless Mode, CI/CD und Troubleshooting machen es wiederholbar.</a:t>
+            </a:r>
+          </a:p>
+        </p:txBody>
+      </p:sp>
+      <p:sp>
+        <p:nvSpPr>
+          <p:cNvPr id="30" name="footer"/>
+          <p:cNvSpPr/>
+          <p:nvPr/>
+        </p:nvSpPr>
+        <p:spPr>
+          <a:xfrm>
+            <a:off x="8050000" y="4700000"/>
+            <a:ext cx="760000" cy="260000"/>
+          </a:xfrm>
+          <a:prstGeom prst="rect">
+            <a:avLst/>
+          </a:prstGeom>
+          <a:noFill/>
+          <a:ln>
+            <a:noFill/>
+          </a:ln>
+        </p:spPr>
+        <p:txBody>
+          <a:bodyPr wrap="square" lIns="182880" tIns="121920" rIns="182880" bIns="121920">
+            <a:normAutofit/>
+          </a:bodyPr>
+          <a:lstStyle/>
+          <a:p>
+            <a:pPr marL="0" indent="0">
+              <a:buNone/>
+            </a:pPr>
+            <a:r>
+              <a:rPr lang="de-DE" sz="1100">
+                <a:solidFill>
+                  <a:srgbClr val="94A3B8"/>
+                </a:solidFill>
+                <a:latin typeface="Aptos"/>
+                <a:ea typeface="Aptos"/>
+                <a:cs typeface="Aptos"/>
+              </a:rPr>
+              <a:t>19 / 30</a:t>
+            </a:r>
+          </a:p>
+        </p:txBody>
+      </p:sp>
+    </p:spTree>
+  </p:cSld>
+  <p:clrMapOvr>
+    <a:masterClrMapping/>
+  </p:clrMapOvr>
+</p:sld>
+</file>
+
+<file path=ppt/slides/slide21.xml><?xml version="1.0" encoding="utf-8"?>
+<p:sld xmlns:a="http://schemas.openxmlformats.org/drawingml/2006/main" xmlns:r="http://schemas.openxmlformats.org/officeDocument/2006/relationships" xmlns:p="http://schemas.openxmlformats.org/presentationml/2006/main">
+  <p:cSld>
+    <p:bg>
+      <p:bgPr>
+        <a:solidFill>
+          <a:srgbClr val="0F172A"/>
+        </a:solidFill>
+        <a:effectLst/>
+      </p:bgPr>
+    </p:bg>
+    <p:spTree>
+      <p:nvGrpSpPr>
+        <p:cNvPr id="1" name="Group 1"/>
+        <p:cNvGrpSpPr/>
+        <p:nvPr/>
+      </p:nvGrpSpPr>
+      <p:grpSpPr>
+        <a:xfrm>
+          <a:off x="0" y="0"/>
+          <a:ext cx="0" cy="0"/>
+          <a:chOff x="0" y="0"/>
+          <a:chExt cx="0" cy="0"/>
+        </a:xfrm>
+      </p:grpSpPr>
+      <p:sp>
+        <p:nvSpPr>
+          <p:cNvPr id="2" name="top rule"/>
+          <p:cNvSpPr/>
+          <p:nvPr/>
+        </p:nvSpPr>
+        <p:spPr>
+          <a:xfrm>
+            <a:off x="0" y="0"/>
+            <a:ext cx="9144000" cy="73152"/>
+          </a:xfrm>
+          <a:prstGeom prst="rect">
+            <a:avLst/>
+          </a:prstGeom>
+          <a:solidFill>
+            <a:srgbClr val="38BDF8"/>
+          </a:solidFill>
+          <a:ln>
+            <a:noFill/>
+          </a:ln>
+        </p:spPr>
+        <p:txBody>
+          <a:bodyPr wrap="square" lIns="182880" tIns="121920" rIns="182880" bIns="121920">
+            <a:normAutofit/>
+          </a:bodyPr>
+          <a:lstStyle/>
+          <a:p>
+            <a:pPr marL="0" indent="0">
+              <a:buNone/>
+            </a:pPr>
+            <a:r>
+              <a:rPr lang="de-DE" sz="100">
+                <a:solidFill>
+                  <a:srgbClr val="38BDF8"/>
+                </a:solidFill>
+                <a:latin typeface="Aptos"/>
+                <a:ea typeface="Aptos"/>
+                <a:cs typeface="Aptos"/>
+              </a:rPr>
+              <a:t/>
+            </a:r>
+          </a:p>
+        </p:txBody>
+      </p:sp>
+      <p:sp>
+        <p:nvSpPr>
+          <p:cNvPr id="3" name="kicker"/>
+          <p:cNvSpPr/>
+          <p:nvPr/>
+        </p:nvSpPr>
+        <p:spPr>
+          <a:xfrm>
+            <a:off x="548640" y="438912"/>
+            <a:ext cx="4200000" cy="300000"/>
+          </a:xfrm>
+          <a:prstGeom prst="rect">
+            <a:avLst/>
+          </a:prstGeom>
+          <a:noFill/>
+          <a:ln>
+            <a:noFill/>
+          </a:ln>
+        </p:spPr>
+        <p:txBody>
+          <a:bodyPr wrap="square" lIns="182880" tIns="121920" rIns="182880" bIns="121920">
+            <a:normAutofit/>
+          </a:bodyPr>
+          <a:lstStyle/>
+          <a:p>
+            <a:pPr marL="0" indent="0">
+              <a:buNone/>
+            </a:pPr>
+            <a:r>
+              <a:rPr lang="de-DE" sz="1350" b="1">
+                <a:solidFill>
+                  <a:srgbClr val="38BDF8"/>
+                </a:solidFill>
+                <a:latin typeface="Aptos"/>
+                <a:ea typeface="Aptos"/>
+                <a:cs typeface="Aptos"/>
+              </a:rPr>
+              <a:t>MODULE 3.1</a:t>
+            </a:r>
+          </a:p>
+        </p:txBody>
+      </p:sp>
+      <p:sp>
+        <p:nvSpPr>
+          <p:cNvPr id="4" name="title"/>
+          <p:cNvSpPr/>
+          <p:nvPr/>
+        </p:nvSpPr>
+        <p:spPr>
+          <a:xfrm>
+            <a:off x="548640" y="770000"/>
+            <a:ext cx="8100000" cy="720000"/>
+          </a:xfrm>
+          <a:prstGeom prst="rect">
+            <a:avLst/>
+          </a:prstGeom>
+          <a:noFill/>
+          <a:ln>
+            <a:noFill/>
+          </a:ln>
+        </p:spPr>
+        <p:txBody>
+          <a:bodyPr wrap="square" lIns="182880" tIns="121920" rIns="182880" bIns="121920">
+            <a:normAutofit/>
+          </a:bodyPr>
+          <a:lstStyle/>
+          <a:p>
+            <a:pPr marL="0" indent="0">
+              <a:buNone/>
+            </a:pPr>
+            <a:r>
+              <a:rPr lang="de-DE" sz="3900" b="1">
+                <a:solidFill>
+                  <a:srgbClr val="F8FAFC"/>
+                </a:solidFill>
+                <a:latin typeface="Aptos"/>
+                <a:ea typeface="Aptos"/>
+                <a:cs typeface="Aptos"/>
+              </a:rPr>
+              <a:t>Agents &amp; Multi-Agent</a:t>
+            </a:r>
+          </a:p>
+        </p:txBody>
+      </p:sp>
+      <p:sp>
+        <p:nvSpPr>
+          <p:cNvPr id="5" name="subtitle"/>
+          <p:cNvSpPr/>
+          <p:nvPr/>
+        </p:nvSpPr>
+        <p:spPr>
+          <a:xfrm>
+            <a:off x="548640" y="1510000"/>
+            <a:ext cx="7900000" cy="560000"/>
+          </a:xfrm>
+          <a:prstGeom prst="rect">
+            <a:avLst/>
+          </a:prstGeom>
+          <a:noFill/>
+          <a:ln>
+            <a:noFill/>
+          </a:ln>
+        </p:spPr>
+        <p:txBody>
+          <a:bodyPr wrap="square" lIns="182880" tIns="121920" rIns="182880" bIns="121920">
+            <a:normAutofit/>
+          </a:bodyPr>
+          <a:lstStyle/>
+          <a:p>
+            <a:pPr marL="0" indent="0">
+              <a:buNone/>
+            </a:pPr>
+            <a:r>
+              <a:rPr lang="de-DE" sz="1750">
+                <a:solidFill>
+                  <a:srgbClr val="CBD5E1"/>
+                </a:solidFill>
+                <a:latin typeface="Aptos"/>
+                <a:ea typeface="Aptos"/>
+                <a:cs typeface="Aptos"/>
+              </a:rPr>
+              <a:t>Nicht ein grosser Agent, sondern spezialisierte Rollen mit klaren Grenzen.</a:t>
+            </a:r>
+          </a:p>
+        </p:txBody>
+      </p:sp>
+      <p:sp>
+        <p:nvSpPr>
+          <p:cNvPr id="10" name="card 1"/>
+          <p:cNvSpPr/>
+          <p:nvPr/>
+        </p:nvSpPr>
+        <p:spPr>
+          <a:xfrm>
+            <a:off x="548640" y="2320000"/>
+            <a:ext cx="2500000" cy="1540000"/>
+          </a:xfrm>
+          <a:prstGeom prst="roundRect">
+            <a:avLst/>
+          </a:prstGeom>
+          <a:solidFill>
+            <a:srgbClr val="1E293B"/>
+          </a:solidFill>
+          <a:ln w="12700">
+            <a:solidFill>
+              <a:srgbClr val="334155"/>
+            </a:solidFill>
+          </a:ln>
+        </p:spPr>
+        <p:txBody>
+          <a:bodyPr wrap="square" lIns="182880" tIns="121920" rIns="182880" bIns="121920">
+            <a:normAutofit/>
+          </a:bodyPr>
+          <a:lstStyle/>
+          <a:p>
+            <a:pPr marL="0" indent="0">
+              <a:buNone/>
+            </a:pPr>
+            <a:r>
+              <a:rPr lang="de-DE" sz="1850" b="1">
+                <a:solidFill>
+                  <a:srgbClr val="F8FAFC"/>
+                </a:solidFill>
+                <a:latin typeface="Aptos"/>
+                <a:ea typeface="Aptos"/>
+                <a:cs typeface="Aptos"/>
+              </a:rPr>
+              <a:t>Explorer</a:t>
+            </a:r>
+          </a:p>
+          <a:p>
+            <a:pPr marL="0" indent="0">
+              <a:buNone/>
+            </a:pPr>
+            <a:r>
+              <a:rPr lang="de-DE" sz="1400">
+                <a:solidFill>
+                  <a:srgbClr val="CBD5E1"/>
+                </a:solidFill>
+                <a:latin typeface="Aptos"/>
+                <a:ea typeface="Aptos"/>
+                <a:cs typeface="Aptos"/>
+              </a:rPr>
+              <a:t>liest, kartiert, liefert Evidenz.</a:t>
+            </a:r>
+          </a:p>
+        </p:txBody>
+      </p:sp>
+      <p:sp>
+        <p:nvSpPr>
+          <p:cNvPr id="11" name="card 2"/>
+          <p:cNvSpPr/>
+          <p:nvPr/>
+        </p:nvSpPr>
+        <p:spPr>
+          <a:xfrm>
+            <a:off x="3308640" y="2320000"/>
+            <a:ext cx="2500000" cy="1540000"/>
+          </a:xfrm>
+          <a:prstGeom prst="roundRect">
+            <a:avLst/>
+          </a:prstGeom>
+          <a:solidFill>
+            <a:srgbClr val="1E293B"/>
+          </a:solidFill>
+          <a:ln w="12700">
+            <a:solidFill>
+              <a:srgbClr val="334155"/>
+            </a:solidFill>
+          </a:ln>
+        </p:spPr>
+        <p:txBody>
+          <a:bodyPr wrap="square" lIns="182880" tIns="121920" rIns="182880" bIns="121920">
+            <a:normAutofit/>
+          </a:bodyPr>
+          <a:lstStyle/>
+          <a:p>
+            <a:pPr marL="0" indent="0">
+              <a:buNone/>
+            </a:pPr>
+            <a:r>
+              <a:rPr lang="de-DE" sz="1850" b="1">
+                <a:solidFill>
+                  <a:srgbClr val="F8FAFC"/>
+                </a:solidFill>
+                <a:latin typeface="Aptos"/>
+                <a:ea typeface="Aptos"/>
+                <a:cs typeface="Aptos"/>
+              </a:rPr>
+              <a:t>Worker</a:t>
+            </a:r>
+          </a:p>
+          <a:p>
+            <a:pPr marL="0" indent="0">
+              <a:buNone/>
+            </a:pPr>
+            <a:r>
+              <a:rPr lang="de-DE" sz="1400">
+                <a:solidFill>
+                  <a:srgbClr val="CBD5E1"/>
+                </a:solidFill>
+                <a:latin typeface="Aptos"/>
+                <a:ea typeface="Aptos"/>
+                <a:cs typeface="Aptos"/>
+              </a:rPr>
+              <a:t>implementiert in klarer Ownership.</a:t>
+            </a:r>
+          </a:p>
+        </p:txBody>
+      </p:sp>
+      <p:sp>
+        <p:nvSpPr>
+          <p:cNvPr id="12" name="card 3"/>
+          <p:cNvSpPr/>
+          <p:nvPr/>
+        </p:nvSpPr>
+        <p:spPr>
+          <a:xfrm>
+            <a:off x="6068640" y="2320000"/>
+            <a:ext cx="2500000" cy="1540000"/>
+          </a:xfrm>
+          <a:prstGeom prst="roundRect">
+            <a:avLst/>
+          </a:prstGeom>
+          <a:solidFill>
+            <a:srgbClr val="1E293B"/>
+          </a:solidFill>
+          <a:ln w="12700">
+            <a:solidFill>
+              <a:srgbClr val="334155"/>
+            </a:solidFill>
+          </a:ln>
+        </p:spPr>
+        <p:txBody>
+          <a:bodyPr wrap="square" lIns="182880" tIns="121920" rIns="182880" bIns="121920">
+            <a:normAutofit/>
+          </a:bodyPr>
+          <a:lstStyle/>
+          <a:p>
+            <a:pPr marL="0" indent="0">
+              <a:buNone/>
+            </a:pPr>
+            <a:r>
+              <a:rPr lang="de-DE" sz="1850" b="1">
+                <a:solidFill>
+                  <a:srgbClr val="F8FAFC"/>
+                </a:solidFill>
+                <a:latin typeface="Aptos"/>
+                <a:ea typeface="Aptos"/>
+                <a:cs typeface="Aptos"/>
+              </a:rPr>
+              <a:t>Reviewer</a:t>
+            </a:r>
+          </a:p>
+          <a:p>
+            <a:pPr marL="0" indent="0">
+              <a:buNone/>
+            </a:pPr>
+            <a:r>
+              <a:rPr lang="de-DE" sz="1400">
+                <a:solidFill>
+                  <a:srgbClr val="CBD5E1"/>
+                </a:solidFill>
+                <a:latin typeface="Aptos"/>
+                <a:ea typeface="Aptos"/>
+                <a:cs typeface="Aptos"/>
+              </a:rPr>
+              <a:t>sucht Risiken, Drift und fehlende Checks.</a:t>
+            </a:r>
+          </a:p>
+        </p:txBody>
+      </p:sp>
+      <p:sp>
+        <p:nvSpPr>
+          <p:cNvPr id="30" name="footer"/>
+          <p:cNvSpPr/>
+          <p:nvPr/>
+        </p:nvSpPr>
+        <p:spPr>
+          <a:xfrm>
+            <a:off x="8050000" y="4700000"/>
+            <a:ext cx="760000" cy="260000"/>
+          </a:xfrm>
+          <a:prstGeom prst="rect">
+            <a:avLst/>
+          </a:prstGeom>
+          <a:noFill/>
+          <a:ln>
+            <a:noFill/>
+          </a:ln>
+        </p:spPr>
+        <p:txBody>
+          <a:bodyPr wrap="square" lIns="182880" tIns="121920" rIns="182880" bIns="121920">
+            <a:normAutofit/>
+          </a:bodyPr>
+          <a:lstStyle/>
+          <a:p>
+            <a:pPr marL="0" indent="0">
+              <a:buNone/>
+            </a:pPr>
+            <a:r>
+              <a:rPr lang="de-DE" sz="1100">
+                <a:solidFill>
+                  <a:srgbClr val="94A3B8"/>
+                </a:solidFill>
+                <a:latin typeface="Aptos"/>
+                <a:ea typeface="Aptos"/>
+                <a:cs typeface="Aptos"/>
+              </a:rPr>
+              <a:t>20 / 30</a:t>
+            </a:r>
+          </a:p>
+        </p:txBody>
+      </p:sp>
+    </p:spTree>
+  </p:cSld>
+  <p:clrMapOvr>
+    <a:masterClrMapping/>
+  </p:clrMapOvr>
+</p:sld>
+</file>
+
+<file path=ppt/slides/slide22.xml><?xml version="1.0" encoding="utf-8"?>
+<p:sld xmlns:a="http://schemas.openxmlformats.org/drawingml/2006/main" xmlns:r="http://schemas.openxmlformats.org/officeDocument/2006/relationships" xmlns:p="http://schemas.openxmlformats.org/presentationml/2006/main">
+  <p:cSld>
+    <p:bg>
+      <p:bgPr>
+        <a:solidFill>
+          <a:srgbClr val="0F172A"/>
+        </a:solidFill>
+        <a:effectLst/>
+      </p:bgPr>
+    </p:bg>
+    <p:spTree>
+      <p:nvGrpSpPr>
+        <p:cNvPr id="1" name="Group 1"/>
+        <p:cNvGrpSpPr/>
+        <p:nvPr/>
+      </p:nvGrpSpPr>
+      <p:grpSpPr>
+        <a:xfrm>
+          <a:off x="0" y="0"/>
+          <a:ext cx="0" cy="0"/>
+          <a:chOff x="0" y="0"/>
+          <a:chExt cx="0" cy="0"/>
+        </a:xfrm>
+      </p:grpSpPr>
+      <p:sp>
+        <p:nvSpPr>
+          <p:cNvPr id="2" name="top rule"/>
+          <p:cNvSpPr/>
+          <p:nvPr/>
+        </p:nvSpPr>
+        <p:spPr>
+          <a:xfrm>
+            <a:off x="0" y="0"/>
+            <a:ext cx="9144000" cy="73152"/>
+          </a:xfrm>
+          <a:prstGeom prst="rect">
+            <a:avLst/>
+          </a:prstGeom>
+          <a:solidFill>
+            <a:srgbClr val="38BDF8"/>
+          </a:solidFill>
+          <a:ln>
+            <a:noFill/>
+          </a:ln>
+        </p:spPr>
+        <p:txBody>
+          <a:bodyPr wrap="square" lIns="182880" tIns="121920" rIns="182880" bIns="121920">
+            <a:normAutofit/>
+          </a:bodyPr>
+          <a:lstStyle/>
+          <a:p>
+            <a:pPr marL="0" indent="0">
+              <a:buNone/>
+            </a:pPr>
+            <a:r>
+              <a:rPr lang="de-DE" sz="100">
+                <a:solidFill>
+                  <a:srgbClr val="38BDF8"/>
+                </a:solidFill>
+                <a:latin typeface="Aptos"/>
+                <a:ea typeface="Aptos"/>
+                <a:cs typeface="Aptos"/>
+              </a:rPr>
+              <a:t/>
+            </a:r>
+          </a:p>
+        </p:txBody>
+      </p:sp>
+      <p:sp>
+        <p:nvSpPr>
+          <p:cNvPr id="3" name="kicker"/>
+          <p:cNvSpPr/>
+          <p:nvPr/>
+        </p:nvSpPr>
+        <p:spPr>
+          <a:xfrm>
+            <a:off x="548640" y="438912"/>
+            <a:ext cx="4200000" cy="300000"/>
+          </a:xfrm>
+          <a:prstGeom prst="rect">
+            <a:avLst/>
+          </a:prstGeom>
+          <a:noFill/>
+          <a:ln>
+            <a:noFill/>
+          </a:ln>
+        </p:spPr>
+        <p:txBody>
+          <a:bodyPr wrap="square" lIns="182880" tIns="121920" rIns="182880" bIns="121920">
+            <a:normAutofit/>
+          </a:bodyPr>
+          <a:lstStyle/>
+          <a:p>
+            <a:pPr marL="0" indent="0">
+              <a:buNone/>
+            </a:pPr>
+            <a:r>
+              <a:rPr lang="de-DE" sz="1350" b="1">
+                <a:solidFill>
+                  <a:srgbClr val="38BDF8"/>
+                </a:solidFill>
+                <a:latin typeface="Aptos"/>
+                <a:ea typeface="Aptos"/>
+                <a:cs typeface="Aptos"/>
+              </a:rPr>
+              <a:t>MODULE 3.2</a:t>
+            </a:r>
+          </a:p>
+        </p:txBody>
+      </p:sp>
+      <p:sp>
+        <p:nvSpPr>
+          <p:cNvPr id="4" name="title"/>
+          <p:cNvSpPr/>
+          <p:nvPr/>
+        </p:nvSpPr>
+        <p:spPr>
+          <a:xfrm>
+            <a:off x="548640" y="770000"/>
+            <a:ext cx="8100000" cy="720000"/>
+          </a:xfrm>
+          <a:prstGeom prst="rect">
+            <a:avLst/>
+          </a:prstGeom>
+          <a:noFill/>
+          <a:ln>
+            <a:noFill/>
+          </a:ln>
+        </p:spPr>
+        <p:txBody>
+          <a:bodyPr wrap="square" lIns="182880" tIns="121920" rIns="182880" bIns="121920">
+            <a:normAutofit/>
+          </a:bodyPr>
+          <a:lstStyle/>
+          <a:p>
+            <a:pPr marL="0" indent="0">
+              <a:buNone/>
+            </a:pPr>
+            <a:r>
+              <a:rPr lang="de-DE" sz="3900" b="1">
+                <a:solidFill>
+                  <a:srgbClr val="F8FAFC"/>
+                </a:solidFill>
+                <a:latin typeface="Aptos"/>
+                <a:ea typeface="Aptos"/>
+                <a:cs typeface="Aptos"/>
+              </a:rPr>
+              <a:t>Multi-Model Pipelines</a:t>
+            </a:r>
+          </a:p>
+        </p:txBody>
+      </p:sp>
+      <p:sp>
+        <p:nvSpPr>
+          <p:cNvPr id="5" name="subtitle"/>
+          <p:cNvSpPr/>
+          <p:nvPr/>
+        </p:nvSpPr>
+        <p:spPr>
+          <a:xfrm>
+            <a:off x="548640" y="1510000"/>
+            <a:ext cx="7900000" cy="560000"/>
+          </a:xfrm>
+          <a:prstGeom prst="rect">
+            <a:avLst/>
+          </a:prstGeom>
+          <a:noFill/>
+          <a:ln>
+            <a:noFill/>
+          </a:ln>
+        </p:spPr>
+        <p:txBody>
+          <a:bodyPr wrap="square" lIns="182880" tIns="121920" rIns="182880" bIns="121920">
+            <a:normAutofit/>
+          </a:bodyPr>
+          <a:lstStyle/>
+          <a:p>
+            <a:pPr marL="0" indent="0">
+              <a:buNone/>
+            </a:pPr>
+            <a:r>
+              <a:rPr lang="de-DE" sz="1750">
+                <a:solidFill>
+                  <a:srgbClr val="CBD5E1"/>
+                </a:solidFill>
+                <a:latin typeface="Aptos"/>
+                <a:ea typeface="Aptos"/>
+                <a:cs typeface="Aptos"/>
+              </a:rPr>
+              <a:t>Das teure Modell plant nicht jede Schraube. Das kleine Modell muss nicht die Architektur tragen.</a:t>
+            </a:r>
+          </a:p>
+        </p:txBody>
+      </p:sp>
+      <p:sp>
+        <p:nvSpPr>
+          <p:cNvPr id="10" name="card 1"/>
+          <p:cNvSpPr/>
+          <p:nvPr/>
+        </p:nvSpPr>
+        <p:spPr>
+          <a:xfrm>
+            <a:off x="548640" y="2320000"/>
+            <a:ext cx="2500000" cy="1540000"/>
+          </a:xfrm>
+          <a:prstGeom prst="roundRect">
+            <a:avLst/>
+          </a:prstGeom>
+          <a:solidFill>
+            <a:srgbClr val="1E293B"/>
+          </a:solidFill>
+          <a:ln w="12700">
+            <a:solidFill>
+              <a:srgbClr val="334155"/>
+            </a:solidFill>
+          </a:ln>
+        </p:spPr>
+        <p:txBody>
+          <a:bodyPr wrap="square" lIns="182880" tIns="121920" rIns="182880" bIns="121920">
+            <a:normAutofit/>
+          </a:bodyPr>
+          <a:lstStyle/>
+          <a:p>
+            <a:pPr marL="0" indent="0">
+              <a:buNone/>
+            </a:pPr>
+            <a:r>
+              <a:rPr lang="de-DE" sz="1850" b="1">
+                <a:solidFill>
+                  <a:srgbClr val="F8FAFC"/>
+                </a:solidFill>
+                <a:latin typeface="Aptos"/>
+                <a:ea typeface="Aptos"/>
+                <a:cs typeface="Aptos"/>
+              </a:rPr>
+              <a:t>Plan</a:t>
+            </a:r>
+          </a:p>
+          <a:p>
+            <a:pPr marL="0" indent="0">
+              <a:buNone/>
+            </a:pPr>
+            <a:r>
+              <a:rPr lang="de-DE" sz="1400">
+                <a:solidFill>
+                  <a:srgbClr val="CBD5E1"/>
+                </a:solidFill>
+                <a:latin typeface="Aptos"/>
+                <a:ea typeface="Aptos"/>
+                <a:cs typeface="Aptos"/>
+              </a:rPr>
+              <a:t>starkes Modell fuer Ambiguitaet und Architektur.</a:t>
+            </a:r>
+          </a:p>
+        </p:txBody>
+      </p:sp>
+      <p:sp>
+        <p:nvSpPr>
+          <p:cNvPr id="11" name="card 2"/>
+          <p:cNvSpPr/>
+          <p:nvPr/>
+        </p:nvSpPr>
+        <p:spPr>
+          <a:xfrm>
+            <a:off x="3308640" y="2320000"/>
+            <a:ext cx="2500000" cy="1540000"/>
+          </a:xfrm>
+          <a:prstGeom prst="roundRect">
+            <a:avLst/>
+          </a:prstGeom>
+          <a:solidFill>
+            <a:srgbClr val="1E293B"/>
+          </a:solidFill>
+          <a:ln w="12700">
+            <a:solidFill>
+              <a:srgbClr val="334155"/>
+            </a:solidFill>
+          </a:ln>
+        </p:spPr>
+        <p:txBody>
+          <a:bodyPr wrap="square" lIns="182880" tIns="121920" rIns="182880" bIns="121920">
+            <a:normAutofit/>
+          </a:bodyPr>
+          <a:lstStyle/>
+          <a:p>
+            <a:pPr marL="0" indent="0">
+              <a:buNone/>
+            </a:pPr>
+            <a:r>
+              <a:rPr lang="de-DE" sz="1850" b="1">
+                <a:solidFill>
+                  <a:srgbClr val="F8FAFC"/>
+                </a:solidFill>
+                <a:latin typeface="Aptos"/>
+                <a:ea typeface="Aptos"/>
+                <a:cs typeface="Aptos"/>
+              </a:rPr>
+              <a:t>Implement</a:t>
+            </a:r>
+          </a:p>
+          <a:p>
+            <a:pPr marL="0" indent="0">
+              <a:buNone/>
+            </a:pPr>
+            <a:r>
+              <a:rPr lang="de-DE" sz="1400">
+                <a:solidFill>
+                  <a:srgbClr val="CBD5E1"/>
+                </a:solidFill>
+                <a:latin typeface="Aptos"/>
+                <a:ea typeface="Aptos"/>
+                <a:cs typeface="Aptos"/>
+              </a:rPr>
+              <a:t>schnelles Modell fuer abgegrenzte Codearbeit.</a:t>
+            </a:r>
+          </a:p>
+        </p:txBody>
+      </p:sp>
+      <p:sp>
+        <p:nvSpPr>
+          <p:cNvPr id="12" name="card 3"/>
+          <p:cNvSpPr/>
+          <p:nvPr/>
+        </p:nvSpPr>
+        <p:spPr>
+          <a:xfrm>
+            <a:off x="6068640" y="2320000"/>
+            <a:ext cx="2500000" cy="1540000"/>
+          </a:xfrm>
+          <a:prstGeom prst="roundRect">
+            <a:avLst/>
+          </a:prstGeom>
+          <a:solidFill>
+            <a:srgbClr val="1E293B"/>
+          </a:solidFill>
+          <a:ln w="12700">
+            <a:solidFill>
+              <a:srgbClr val="334155"/>
+            </a:solidFill>
+          </a:ln>
+        </p:spPr>
+        <p:txBody>
+          <a:bodyPr wrap="square" lIns="182880" tIns="121920" rIns="182880" bIns="121920">
+            <a:normAutofit/>
+          </a:bodyPr>
+          <a:lstStyle/>
+          <a:p>
+            <a:pPr marL="0" indent="0">
+              <a:buNone/>
+            </a:pPr>
+            <a:r>
+              <a:rPr lang="de-DE" sz="1850" b="1">
+                <a:solidFill>
+                  <a:srgbClr val="F8FAFC"/>
+                </a:solidFill>
+                <a:latin typeface="Aptos"/>
+                <a:ea typeface="Aptos"/>
+                <a:cs typeface="Aptos"/>
+              </a:rPr>
+              <a:t>Review</a:t>
+            </a:r>
+          </a:p>
+          <a:p>
+            <a:pPr marL="0" indent="0">
+              <a:buNone/>
+            </a:pPr>
+            <a:r>
+              <a:rPr lang="de-DE" sz="1400">
+                <a:solidFill>
+                  <a:srgbClr val="CBD5E1"/>
+                </a:solidFill>
+                <a:latin typeface="Aptos"/>
+                <a:ea typeface="Aptos"/>
+                <a:cs typeface="Aptos"/>
+              </a:rPr>
+              <a:t>kritischer zweiter Blick mit anderem Bias.</a:t>
+            </a:r>
+          </a:p>
+        </p:txBody>
+      </p:sp>
+      <p:sp>
+        <p:nvSpPr>
+          <p:cNvPr id="30" name="footer"/>
+          <p:cNvSpPr/>
+          <p:nvPr/>
+        </p:nvSpPr>
+        <p:spPr>
+          <a:xfrm>
+            <a:off x="8050000" y="4700000"/>
+            <a:ext cx="760000" cy="260000"/>
+          </a:xfrm>
+          <a:prstGeom prst="rect">
+            <a:avLst/>
+          </a:prstGeom>
+          <a:noFill/>
+          <a:ln>
+            <a:noFill/>
+          </a:ln>
+        </p:spPr>
+        <p:txBody>
+          <a:bodyPr wrap="square" lIns="182880" tIns="121920" rIns="182880" bIns="121920">
+            <a:normAutofit/>
+          </a:bodyPr>
+          <a:lstStyle/>
+          <a:p>
+            <a:pPr marL="0" indent="0">
+              <a:buNone/>
+            </a:pPr>
+            <a:r>
+              <a:rPr lang="de-DE" sz="1100">
+                <a:solidFill>
+                  <a:srgbClr val="94A3B8"/>
+                </a:solidFill>
+                <a:latin typeface="Aptos"/>
+                <a:ea typeface="Aptos"/>
+                <a:cs typeface="Aptos"/>
+              </a:rPr>
+              <a:t>21 / 30</a:t>
+            </a:r>
+          </a:p>
+        </p:txBody>
+      </p:sp>
+    </p:spTree>
+  </p:cSld>
+  <p:clrMapOvr>
+    <a:masterClrMapping/>
+  </p:clrMapOvr>
+</p:sld>
+</file>
+
+<file path=ppt/slides/slide23.xml><?xml version="1.0" encoding="utf-8"?>
+<p:sld xmlns:a="http://schemas.openxmlformats.org/drawingml/2006/main" xmlns:r="http://schemas.openxmlformats.org/officeDocument/2006/relationships" xmlns:p="http://schemas.openxmlformats.org/presentationml/2006/main">
+  <p:cSld>
+    <p:bg>
+      <p:bgPr>
+        <a:solidFill>
+          <a:srgbClr val="0F172A"/>
+        </a:solidFill>
+        <a:effectLst/>
+      </p:bgPr>
+    </p:bg>
+    <p:spTree>
+      <p:nvGrpSpPr>
+        <p:cNvPr id="1" name="Group 1"/>
+        <p:cNvGrpSpPr/>
+        <p:nvPr/>
+      </p:nvGrpSpPr>
+      <p:grpSpPr>
+        <a:xfrm>
+          <a:off x="0" y="0"/>
+          <a:ext cx="0" cy="0"/>
+          <a:chOff x="0" y="0"/>
+          <a:chExt cx="0" cy="0"/>
+        </a:xfrm>
+      </p:grpSpPr>
+      <p:sp>
+        <p:nvSpPr>
+          <p:cNvPr id="2" name="top rule"/>
+          <p:cNvSpPr/>
+          <p:nvPr/>
+        </p:nvSpPr>
+        <p:spPr>
+          <a:xfrm>
+            <a:off x="0" y="0"/>
+            <a:ext cx="9144000" cy="73152"/>
+          </a:xfrm>
+          <a:prstGeom prst="rect">
+            <a:avLst/>
+          </a:prstGeom>
+          <a:solidFill>
+            <a:srgbClr val="38BDF8"/>
+          </a:solidFill>
+          <a:ln>
+            <a:noFill/>
+          </a:ln>
+        </p:spPr>
+        <p:txBody>
+          <a:bodyPr wrap="square" lIns="182880" tIns="121920" rIns="182880" bIns="121920">
+            <a:normAutofit/>
+          </a:bodyPr>
+          <a:lstStyle/>
+          <a:p>
+            <a:pPr marL="0" indent="0">
+              <a:buNone/>
+            </a:pPr>
+            <a:r>
+              <a:rPr lang="de-DE" sz="100">
+                <a:solidFill>
+                  <a:srgbClr val="38BDF8"/>
+                </a:solidFill>
+                <a:latin typeface="Aptos"/>
+                <a:ea typeface="Aptos"/>
+                <a:cs typeface="Aptos"/>
+              </a:rPr>
+              <a:t/>
+            </a:r>
+          </a:p>
+        </p:txBody>
+      </p:sp>
+      <p:sp>
+        <p:nvSpPr>
+          <p:cNvPr id="3" name="kicker"/>
+          <p:cNvSpPr/>
+          <p:nvPr/>
+        </p:nvSpPr>
+        <p:spPr>
+          <a:xfrm>
+            <a:off x="548640" y="438912"/>
+            <a:ext cx="4200000" cy="300000"/>
+          </a:xfrm>
+          <a:prstGeom prst="rect">
+            <a:avLst/>
+          </a:prstGeom>
+          <a:noFill/>
+          <a:ln>
+            <a:noFill/>
+          </a:ln>
+        </p:spPr>
+        <p:txBody>
+          <a:bodyPr wrap="square" lIns="182880" tIns="121920" rIns="182880" bIns="121920">
+            <a:normAutofit/>
+          </a:bodyPr>
+          <a:lstStyle/>
+          <a:p>
+            <a:pPr marL="0" indent="0">
+              <a:buNone/>
+            </a:pPr>
+            <a:r>
+              <a:rPr lang="de-DE" sz="1350" b="1">
+                <a:solidFill>
+                  <a:srgbClr val="38BDF8"/>
+                </a:solidFill>
+                <a:latin typeface="Aptos"/>
+                <a:ea typeface="Aptos"/>
+                <a:cs typeface="Aptos"/>
+              </a:rPr>
+              <a:t>MODULE 3.3</a:t>
+            </a:r>
+          </a:p>
+        </p:txBody>
+      </p:sp>
+      <p:sp>
+        <p:nvSpPr>
+          <p:cNvPr id="4" name="title"/>
+          <p:cNvSpPr/>
+          <p:nvPr/>
+        </p:nvSpPr>
+        <p:spPr>
+          <a:xfrm>
+            <a:off x="548640" y="770000"/>
+            <a:ext cx="8100000" cy="720000"/>
+          </a:xfrm>
+          <a:prstGeom prst="rect">
+            <a:avLst/>
+          </a:prstGeom>
+          <a:noFill/>
+          <a:ln>
+            <a:noFill/>
+          </a:ln>
+        </p:spPr>
+        <p:txBody>
+          <a:bodyPr wrap="square" lIns="182880" tIns="121920" rIns="182880" bIns="121920">
+            <a:normAutofit/>
+          </a:bodyPr>
+          <a:lstStyle/>
+          <a:p>
+            <a:pPr marL="0" indent="0">
+              <a:buNone/>
+            </a:pPr>
+            <a:r>
+              <a:rPr lang="de-DE" sz="3900" b="1">
+                <a:solidFill>
+                  <a:srgbClr val="F8FAFC"/>
+                </a:solidFill>
+                <a:latin typeface="Aptos"/>
+                <a:ea typeface="Aptos"/>
+                <a:cs typeface="Aptos"/>
+              </a:rPr>
+              <a:t>Security &amp; Adversarial Testing</a:t>
+            </a:r>
+          </a:p>
+        </p:txBody>
+      </p:sp>
+      <p:sp>
+        <p:nvSpPr>
+          <p:cNvPr id="5" name="subtitle"/>
+          <p:cNvSpPr/>
+          <p:nvPr/>
+        </p:nvSpPr>
+        <p:spPr>
+          <a:xfrm>
+            <a:off x="548640" y="1510000"/>
+            <a:ext cx="7900000" cy="560000"/>
+          </a:xfrm>
+          <a:prstGeom prst="rect">
+            <a:avLst/>
+          </a:prstGeom>
+          <a:noFill/>
+          <a:ln>
+            <a:noFill/>
+          </a:ln>
+        </p:spPr>
+        <p:txBody>
+          <a:bodyPr wrap="square" lIns="182880" tIns="121920" rIns="182880" bIns="121920">
+            <a:normAutofit/>
+          </a:bodyPr>
+          <a:lstStyle/>
+          <a:p>
+            <a:pPr marL="0" indent="0">
+              <a:buNone/>
+            </a:pPr>
+            <a:r>
+              <a:rPr lang="de-DE" sz="1750">
+                <a:solidFill>
+                  <a:srgbClr val="CBD5E1"/>
+                </a:solidFill>
+                <a:latin typeface="Aptos"/>
+                <a:ea typeface="Aptos"/>
+                <a:cs typeface="Aptos"/>
+              </a:rPr>
+              <a:t>Security-Analogie: der Agent ist ein externer Techniker mit Badge, Werkzeugkoffer und Auditpflicht.</a:t>
+            </a:r>
+          </a:p>
+        </p:txBody>
+      </p:sp>
+      <p:sp>
+        <p:nvSpPr>
+          <p:cNvPr id="10" name="card 1"/>
+          <p:cNvSpPr/>
+          <p:nvPr/>
+        </p:nvSpPr>
+        <p:spPr>
+          <a:xfrm>
+            <a:off x="548640" y="2320000"/>
+            <a:ext cx="2500000" cy="1540000"/>
+          </a:xfrm>
+          <a:prstGeom prst="roundRect">
+            <a:avLst/>
+          </a:prstGeom>
+          <a:solidFill>
+            <a:srgbClr val="1E293B"/>
+          </a:solidFill>
+          <a:ln w="12700">
+            <a:solidFill>
+              <a:srgbClr val="334155"/>
+            </a:solidFill>
+          </a:ln>
+        </p:spPr>
+        <p:txBody>
+          <a:bodyPr wrap="square" lIns="182880" tIns="121920" rIns="182880" bIns="121920">
+            <a:normAutofit/>
+          </a:bodyPr>
+          <a:lstStyle/>
+          <a:p>
+            <a:pPr marL="0" indent="0">
+              <a:buNone/>
+            </a:pPr>
+            <a:r>
+              <a:rPr lang="de-DE" sz="1850" b="1">
+                <a:solidFill>
+                  <a:srgbClr val="F8FAFC"/>
+                </a:solidFill>
+                <a:latin typeface="Aptos"/>
+                <a:ea typeface="Aptos"/>
+                <a:cs typeface="Aptos"/>
+              </a:rPr>
+              <a:t>Permission Rules</a:t>
+            </a:r>
+          </a:p>
+          <a:p>
+            <a:pPr marL="0" indent="0">
+              <a:buNone/>
+            </a:pPr>
+            <a:r>
+              <a:rPr lang="de-DE" sz="1400">
+                <a:solidFill>
+                  <a:srgbClr val="CBD5E1"/>
+                </a:solidFill>
+                <a:latin typeface="Aptos"/>
+                <a:ea typeface="Aptos"/>
+                <a:cs typeface="Aptos"/>
+              </a:rPr>
+              <a:t>erlauben, blocken, nachfragen - explizit statt Hoffnung.</a:t>
+            </a:r>
+          </a:p>
+        </p:txBody>
+      </p:sp>
+      <p:sp>
+        <p:nvSpPr>
+          <p:cNvPr id="11" name="card 2"/>
+          <p:cNvSpPr/>
+          <p:nvPr/>
+        </p:nvSpPr>
+        <p:spPr>
+          <a:xfrm>
+            <a:off x="3308640" y="2320000"/>
+            <a:ext cx="2500000" cy="1540000"/>
+          </a:xfrm>
+          <a:prstGeom prst="roundRect">
+            <a:avLst/>
+          </a:prstGeom>
+          <a:solidFill>
+            <a:srgbClr val="1E293B"/>
+          </a:solidFill>
+          <a:ln w="12700">
+            <a:solidFill>
+              <a:srgbClr val="334155"/>
+            </a:solidFill>
+          </a:ln>
+        </p:spPr>
+        <p:txBody>
+          <a:bodyPr wrap="square" lIns="182880" tIns="121920" rIns="182880" bIns="121920">
+            <a:normAutofit/>
+          </a:bodyPr>
+          <a:lstStyle/>
+          <a:p>
+            <a:pPr marL="0" indent="0">
+              <a:buNone/>
+            </a:pPr>
+            <a:r>
+              <a:rPr lang="de-DE" sz="1850" b="1">
+                <a:solidFill>
+                  <a:srgbClr val="F8FAFC"/>
+                </a:solidFill>
+                <a:latin typeface="Aptos"/>
+                <a:ea typeface="Aptos"/>
+                <a:cs typeface="Aptos"/>
+              </a:rPr>
+              <a:t>Sandboxing</a:t>
+            </a:r>
+          </a:p>
+          <a:p>
+            <a:pPr marL="0" indent="0">
+              <a:buNone/>
+            </a:pPr>
+            <a:r>
+              <a:rPr lang="de-DE" sz="1400">
+                <a:solidFill>
+                  <a:srgbClr val="CBD5E1"/>
+                </a:solidFill>
+                <a:latin typeface="Aptos"/>
+                <a:ea typeface="Aptos"/>
+                <a:cs typeface="Aptos"/>
+              </a:rPr>
+              <a:t>Netz, Filesystem und Secrets als getrennte Zonen denken.</a:t>
+            </a:r>
+          </a:p>
+        </p:txBody>
+      </p:sp>
+      <p:sp>
+        <p:nvSpPr>
+          <p:cNvPr id="12" name="card 3"/>
+          <p:cNvSpPr/>
+          <p:nvPr/>
+        </p:nvSpPr>
+        <p:spPr>
+          <a:xfrm>
+            <a:off x="6068640" y="2320000"/>
+            <a:ext cx="2500000" cy="1540000"/>
+          </a:xfrm>
+          <a:prstGeom prst="roundRect">
+            <a:avLst/>
+          </a:prstGeom>
+          <a:solidFill>
+            <a:srgbClr val="1E293B"/>
+          </a:solidFill>
+          <a:ln w="12700">
+            <a:solidFill>
+              <a:srgbClr val="334155"/>
+            </a:solidFill>
+          </a:ln>
+        </p:spPr>
+        <p:txBody>
+          <a:bodyPr wrap="square" lIns="182880" tIns="121920" rIns="182880" bIns="121920">
+            <a:normAutofit/>
+          </a:bodyPr>
+          <a:lstStyle/>
+          <a:p>
+            <a:pPr marL="0" indent="0">
+              <a:buNone/>
+            </a:pPr>
+            <a:r>
+              <a:rPr lang="de-DE" sz="1850" b="1">
+                <a:solidFill>
+                  <a:srgbClr val="F8FAFC"/>
+                </a:solidFill>
+                <a:latin typeface="Aptos"/>
+                <a:ea typeface="Aptos"/>
+                <a:cs typeface="Aptos"/>
+              </a:rPr>
+              <a:t>Adversarial Review</a:t>
+            </a:r>
+          </a:p>
+          <a:p>
+            <a:pPr marL="0" indent="0">
+              <a:buNone/>
+            </a:pPr>
+            <a:r>
+              <a:rPr lang="de-DE" sz="1400">
+                <a:solidFill>
+                  <a:srgbClr val="CBD5E1"/>
+                </a:solidFill>
+                <a:latin typeface="Aptos"/>
+                <a:ea typeface="Aptos"/>
+                <a:cs typeface="Aptos"/>
+              </a:rPr>
+              <a:t>Devil-Advocate reduziert blinde Flecken, ersetzt aber keine Freigabe.</a:t>
+            </a:r>
+          </a:p>
+        </p:txBody>
+      </p:sp>
+      <p:sp>
+        <p:nvSpPr>
+          <p:cNvPr id="30" name="footer"/>
+          <p:cNvSpPr/>
+          <p:nvPr/>
+        </p:nvSpPr>
+        <p:spPr>
+          <a:xfrm>
+            <a:off x="8050000" y="4700000"/>
+            <a:ext cx="760000" cy="260000"/>
+          </a:xfrm>
+          <a:prstGeom prst="rect">
+            <a:avLst/>
+          </a:prstGeom>
+          <a:noFill/>
+          <a:ln>
+            <a:noFill/>
+          </a:ln>
+        </p:spPr>
+        <p:txBody>
+          <a:bodyPr wrap="square" lIns="182880" tIns="121920" rIns="182880" bIns="121920">
+            <a:normAutofit/>
+          </a:bodyPr>
+          <a:lstStyle/>
+          <a:p>
+            <a:pPr marL="0" indent="0">
+              <a:buNone/>
+            </a:pPr>
+            <a:r>
+              <a:rPr lang="de-DE" sz="1100">
+                <a:solidFill>
+                  <a:srgbClr val="94A3B8"/>
+                </a:solidFill>
+                <a:latin typeface="Aptos"/>
+                <a:ea typeface="Aptos"/>
+                <a:cs typeface="Aptos"/>
+              </a:rPr>
+              <a:t>22 / 30</a:t>
+            </a:r>
+          </a:p>
+        </p:txBody>
+      </p:sp>
+    </p:spTree>
+  </p:cSld>
+  <p:clrMapOvr>
+    <a:masterClrMapping/>
+  </p:clrMapOvr>
+</p:sld>
+</file>
+
+<file path=ppt/slides/slide24.xml><?xml version="1.0" encoding="utf-8"?>
+<p:sld xmlns:a="http://schemas.openxmlformats.org/drawingml/2006/main" xmlns:r="http://schemas.openxmlformats.org/officeDocument/2006/relationships" xmlns:p="http://schemas.openxmlformats.org/presentationml/2006/main">
+  <p:cSld>
+    <p:bg>
+      <p:bgPr>
+        <a:solidFill>
+          <a:srgbClr val="0F172A"/>
+        </a:solidFill>
+        <a:effectLst/>
+      </p:bgPr>
+    </p:bg>
+    <p:spTree>
+      <p:nvGrpSpPr>
+        <p:cNvPr id="1" name="Group 1"/>
+        <p:cNvGrpSpPr/>
+        <p:nvPr/>
+      </p:nvGrpSpPr>
+      <p:grpSpPr>
+        <a:xfrm>
+          <a:off x="0" y="0"/>
+          <a:ext cx="0" cy="0"/>
+          <a:chOff x="0" y="0"/>
+          <a:chExt cx="0" cy="0"/>
+        </a:xfrm>
+      </p:grpSpPr>
+      <p:sp>
+        <p:nvSpPr>
+          <p:cNvPr id="2" name="top rule"/>
+          <p:cNvSpPr/>
+          <p:nvPr/>
+        </p:nvSpPr>
+        <p:spPr>
+          <a:xfrm>
+            <a:off x="0" y="0"/>
+            <a:ext cx="9144000" cy="73152"/>
+          </a:xfrm>
+          <a:prstGeom prst="rect">
+            <a:avLst/>
+          </a:prstGeom>
+          <a:solidFill>
+            <a:srgbClr val="38BDF8"/>
+          </a:solidFill>
+          <a:ln>
+            <a:noFill/>
+          </a:ln>
+        </p:spPr>
+        <p:txBody>
+          <a:bodyPr wrap="square" lIns="182880" tIns="121920" rIns="182880" bIns="121920">
+            <a:normAutofit/>
+          </a:bodyPr>
+          <a:lstStyle/>
+          <a:p>
+            <a:pPr marL="0" indent="0">
+              <a:buNone/>
+            </a:pPr>
+            <a:r>
+              <a:rPr lang="de-DE" sz="100">
+                <a:solidFill>
+                  <a:srgbClr val="38BDF8"/>
+                </a:solidFill>
+                <a:latin typeface="Aptos"/>
+                <a:ea typeface="Aptos"/>
+                <a:cs typeface="Aptos"/>
+              </a:rPr>
+              <a:t/>
+            </a:r>
+          </a:p>
+        </p:txBody>
+      </p:sp>
+      <p:sp>
+        <p:nvSpPr>
+          <p:cNvPr id="3" name="kicker"/>
+          <p:cNvSpPr/>
+          <p:nvPr/>
+        </p:nvSpPr>
+        <p:spPr>
+          <a:xfrm>
+            <a:off x="548640" y="438912"/>
+            <a:ext cx="4200000" cy="300000"/>
+          </a:xfrm>
+          <a:prstGeom prst="rect">
+            <a:avLst/>
+          </a:prstGeom>
+          <a:noFill/>
+          <a:ln>
+            <a:noFill/>
+          </a:ln>
+        </p:spPr>
+        <p:txBody>
+          <a:bodyPr wrap="square" lIns="182880" tIns="121920" rIns="182880" bIns="121920">
+            <a:normAutofit/>
+          </a:bodyPr>
+          <a:lstStyle/>
+          <a:p>
+            <a:pPr marL="0" indent="0">
+              <a:buNone/>
+            </a:pPr>
+            <a:r>
+              <a:rPr lang="de-DE" sz="1350" b="1">
+                <a:solidFill>
+                  <a:srgbClr val="38BDF8"/>
+                </a:solidFill>
+                <a:latin typeface="Aptos"/>
+                <a:ea typeface="Aptos"/>
+                <a:cs typeface="Aptos"/>
+              </a:rPr>
+              <a:t>MODULE 3.4</a:t>
+            </a:r>
+          </a:p>
+        </p:txBody>
+      </p:sp>
+      <p:sp>
+        <p:nvSpPr>
+          <p:cNvPr id="4" name="title"/>
+          <p:cNvSpPr/>
+          <p:nvPr/>
+        </p:nvSpPr>
+        <p:spPr>
+          <a:xfrm>
+            <a:off x="548640" y="770000"/>
+            <a:ext cx="8100000" cy="720000"/>
+          </a:xfrm>
+          <a:prstGeom prst="rect">
+            <a:avLst/>
+          </a:prstGeom>
+          <a:noFill/>
+          <a:ln>
+            <a:noFill/>
+          </a:ln>
+        </p:spPr>
+        <p:txBody>
+          <a:bodyPr wrap="square" lIns="182880" tIns="121920" rIns="182880" bIns="121920">
+            <a:normAutofit/>
+          </a:bodyPr>
+          <a:lstStyle/>
+          <a:p>
+            <a:pPr marL="0" indent="0">
+              <a:buNone/>
+            </a:pPr>
+            <a:r>
+              <a:rPr lang="de-DE" sz="3900" b="1">
+                <a:solidFill>
+                  <a:srgbClr val="F8FAFC"/>
+                </a:solidFill>
+                <a:latin typeface="Aptos"/>
+                <a:ea typeface="Aptos"/>
+                <a:cs typeface="Aptos"/>
+              </a:rPr>
+              <a:t>Automation &amp; Scheduled Work</a:t>
+            </a:r>
+          </a:p>
+        </p:txBody>
+      </p:sp>
+      <p:sp>
+        <p:nvSpPr>
+          <p:cNvPr id="5" name="subtitle"/>
+          <p:cNvSpPr/>
+          <p:nvPr/>
+        </p:nvSpPr>
+        <p:spPr>
+          <a:xfrm>
+            <a:off x="548640" y="1510000"/>
+            <a:ext cx="7900000" cy="560000"/>
+          </a:xfrm>
+          <a:prstGeom prst="rect">
+            <a:avLst/>
+          </a:prstGeom>
+          <a:noFill/>
+          <a:ln>
+            <a:noFill/>
+          </a:ln>
+        </p:spPr>
+        <p:txBody>
+          <a:bodyPr wrap="square" lIns="182880" tIns="121920" rIns="182880" bIns="121920">
+            <a:normAutofit/>
+          </a:bodyPr>
+          <a:lstStyle/>
+          <a:p>
+            <a:pPr marL="0" indent="0">
+              <a:buNone/>
+            </a:pPr>
+            <a:r>
+              <a:rPr lang="de-DE" sz="1750">
+                <a:solidFill>
+                  <a:srgbClr val="CBD5E1"/>
+                </a:solidFill>
+                <a:latin typeface="Aptos"/>
+                <a:ea typeface="Aptos"/>
+                <a:cs typeface="Aptos"/>
+              </a:rPr>
+              <a:t>Wiederholbare Agentenarbeit braucht Stop-Regeln, Budget und menschliche Tore.</a:t>
+            </a:r>
+          </a:p>
+        </p:txBody>
+      </p:sp>
+      <p:sp>
+        <p:nvSpPr>
+          <p:cNvPr id="10" name="card 1"/>
+          <p:cNvSpPr/>
+          <p:nvPr/>
+        </p:nvSpPr>
+        <p:spPr>
+          <a:xfrm>
+            <a:off x="548640" y="2320000"/>
+            <a:ext cx="2500000" cy="1540000"/>
+          </a:xfrm>
+          <a:prstGeom prst="roundRect">
+            <a:avLst/>
+          </a:prstGeom>
+          <a:solidFill>
+            <a:srgbClr val="1E293B"/>
+          </a:solidFill>
+          <a:ln w="12700">
+            <a:solidFill>
+              <a:srgbClr val="334155"/>
+            </a:solidFill>
+          </a:ln>
+        </p:spPr>
+        <p:txBody>
+          <a:bodyPr wrap="square" lIns="182880" tIns="121920" rIns="182880" bIns="121920">
+            <a:normAutofit/>
+          </a:bodyPr>
+          <a:lstStyle/>
+          <a:p>
+            <a:pPr marL="0" indent="0">
+              <a:buNone/>
+            </a:pPr>
+            <a:r>
+              <a:rPr lang="de-DE" sz="1850" b="1">
+                <a:solidFill>
+                  <a:srgbClr val="F8FAFC"/>
+                </a:solidFill>
+                <a:latin typeface="Aptos"/>
+                <a:ea typeface="Aptos"/>
+                <a:cs typeface="Aptos"/>
+              </a:rPr>
+              <a:t>/goal</a:t>
+            </a:r>
+          </a:p>
+          <a:p>
+            <a:pPr marL="0" indent="0">
+              <a:buNone/>
+            </a:pPr>
+            <a:r>
+              <a:rPr lang="de-DE" sz="1400">
+                <a:solidFill>
+                  <a:srgbClr val="CBD5E1"/>
+                </a:solidFill>
+                <a:latin typeface="Aptos"/>
+                <a:ea typeface="Aptos"/>
+                <a:cs typeface="Aptos"/>
+              </a:rPr>
+              <a:t>Zielorientierte Loop mit Fortschrittskontrolle.</a:t>
+            </a:r>
+          </a:p>
+        </p:txBody>
+      </p:sp>
+      <p:sp>
+        <p:nvSpPr>
+          <p:cNvPr id="11" name="card 2"/>
+          <p:cNvSpPr/>
+          <p:nvPr/>
+        </p:nvSpPr>
+        <p:spPr>
+          <a:xfrm>
+            <a:off x="3308640" y="2320000"/>
+            <a:ext cx="2500000" cy="1540000"/>
+          </a:xfrm>
+          <a:prstGeom prst="roundRect">
+            <a:avLst/>
+          </a:prstGeom>
+          <a:solidFill>
+            <a:srgbClr val="1E293B"/>
+          </a:solidFill>
+          <a:ln w="12700">
+            <a:solidFill>
+              <a:srgbClr val="334155"/>
+            </a:solidFill>
+          </a:ln>
+        </p:spPr>
+        <p:txBody>
+          <a:bodyPr wrap="square" lIns="182880" tIns="121920" rIns="182880" bIns="121920">
+            <a:normAutofit/>
+          </a:bodyPr>
+          <a:lstStyle/>
+          <a:p>
+            <a:pPr marL="0" indent="0">
+              <a:buNone/>
+            </a:pPr>
+            <a:r>
+              <a:rPr lang="de-DE" sz="1850" b="1">
+                <a:solidFill>
+                  <a:srgbClr val="F8FAFC"/>
+                </a:solidFill>
+                <a:latin typeface="Aptos"/>
+                <a:ea typeface="Aptos"/>
+                <a:cs typeface="Aptos"/>
+              </a:rPr>
+              <a:t>Routines</a:t>
+            </a:r>
+          </a:p>
+          <a:p>
+            <a:pPr marL="0" indent="0">
+              <a:buNone/>
+            </a:pPr>
+            <a:r>
+              <a:rPr lang="de-DE" sz="1400">
+                <a:solidFill>
+                  <a:srgbClr val="CBD5E1"/>
+                </a:solidFill>
+                <a:latin typeface="Aptos"/>
+                <a:ea typeface="Aptos"/>
+                <a:cs typeface="Aptos"/>
+              </a:rPr>
+              <a:t>Wiederkehrende Wartung statt Einmal-Prompt.</a:t>
+            </a:r>
+          </a:p>
+        </p:txBody>
+      </p:sp>
+      <p:sp>
+        <p:nvSpPr>
+          <p:cNvPr id="12" name="card 3"/>
+          <p:cNvSpPr/>
+          <p:nvPr/>
+        </p:nvSpPr>
+        <p:spPr>
+          <a:xfrm>
+            <a:off x="6068640" y="2320000"/>
+            <a:ext cx="2500000" cy="1540000"/>
+          </a:xfrm>
+          <a:prstGeom prst="roundRect">
+            <a:avLst/>
+          </a:prstGeom>
+          <a:solidFill>
+            <a:srgbClr val="1E293B"/>
+          </a:solidFill>
+          <a:ln w="12700">
+            <a:solidFill>
+              <a:srgbClr val="334155"/>
+            </a:solidFill>
+          </a:ln>
+        </p:spPr>
+        <p:txBody>
+          <a:bodyPr wrap="square" lIns="182880" tIns="121920" rIns="182880" bIns="121920">
+            <a:normAutofit/>
+          </a:bodyPr>
+          <a:lstStyle/>
+          <a:p>
+            <a:pPr marL="0" indent="0">
+              <a:buNone/>
+            </a:pPr>
+            <a:r>
+              <a:rPr lang="de-DE" sz="1850" b="1">
+                <a:solidFill>
+                  <a:srgbClr val="F8FAFC"/>
+                </a:solidFill>
+                <a:latin typeface="Aptos"/>
+                <a:ea typeface="Aptos"/>
+                <a:cs typeface="Aptos"/>
+              </a:rPr>
+              <a:t>Safety Gates</a:t>
+            </a:r>
+          </a:p>
+          <a:p>
+            <a:pPr marL="0" indent="0">
+              <a:buNone/>
+            </a:pPr>
+            <a:r>
+              <a:rPr lang="de-DE" sz="1400">
+                <a:solidFill>
+                  <a:srgbClr val="CBD5E1"/>
+                </a:solidFill>
+                <a:latin typeface="Aptos"/>
+                <a:ea typeface="Aptos"/>
+                <a:cs typeface="Aptos"/>
+              </a:rPr>
+              <a:t>kein autonomes Firmware-Update ohne Approval.</a:t>
+            </a:r>
+          </a:p>
+        </p:txBody>
+      </p:sp>
+      <p:sp>
+        <p:nvSpPr>
+          <p:cNvPr id="30" name="footer"/>
+          <p:cNvSpPr/>
+          <p:nvPr/>
+        </p:nvSpPr>
+        <p:spPr>
+          <a:xfrm>
+            <a:off x="8050000" y="4700000"/>
+            <a:ext cx="760000" cy="260000"/>
+          </a:xfrm>
+          <a:prstGeom prst="rect">
+            <a:avLst/>
+          </a:prstGeom>
+          <a:noFill/>
+          <a:ln>
+            <a:noFill/>
+          </a:ln>
+        </p:spPr>
+        <p:txBody>
+          <a:bodyPr wrap="square" lIns="182880" tIns="121920" rIns="182880" bIns="121920">
+            <a:normAutofit/>
+          </a:bodyPr>
+          <a:lstStyle/>
+          <a:p>
+            <a:pPr marL="0" indent="0">
+              <a:buNone/>
+            </a:pPr>
+            <a:r>
+              <a:rPr lang="de-DE" sz="1100">
+                <a:solidFill>
+                  <a:srgbClr val="94A3B8"/>
+                </a:solidFill>
+                <a:latin typeface="Aptos"/>
+                <a:ea typeface="Aptos"/>
+                <a:cs typeface="Aptos"/>
+              </a:rPr>
+              <a:t>23 / 30</a:t>
+            </a:r>
+          </a:p>
+        </p:txBody>
+      </p:sp>
+    </p:spTree>
+  </p:cSld>
+  <p:clrMapOvr>
+    <a:masterClrMapping/>
+  </p:clrMapOvr>
+</p:sld>
+</file>
+
+<file path=ppt/slides/slide25.xml><?xml version="1.0" encoding="utf-8"?>
+<p:sld xmlns:a="http://schemas.openxmlformats.org/drawingml/2006/main" xmlns:r="http://schemas.openxmlformats.org/officeDocument/2006/relationships" xmlns:p="http://schemas.openxmlformats.org/presentationml/2006/main">
+  <p:cSld>
+    <p:bg>
+      <p:bgPr>
+        <a:solidFill>
+          <a:srgbClr val="0F172A"/>
+        </a:solidFill>
+        <a:effectLst/>
+      </p:bgPr>
+    </p:bg>
+    <p:spTree>
+      <p:nvGrpSpPr>
+        <p:cNvPr id="1" name="Group 1"/>
+        <p:cNvGrpSpPr/>
+        <p:nvPr/>
+      </p:nvGrpSpPr>
+      <p:grpSpPr>
+        <a:xfrm>
+          <a:off x="0" y="0"/>
+          <a:ext cx="0" cy="0"/>
+          <a:chOff x="0" y="0"/>
+          <a:chExt cx="0" cy="0"/>
+        </a:xfrm>
+      </p:grpSpPr>
+      <p:sp>
+        <p:nvSpPr>
+          <p:cNvPr id="2" name="top rule"/>
+          <p:cNvSpPr/>
+          <p:nvPr/>
+        </p:nvSpPr>
+        <p:spPr>
+          <a:xfrm>
+            <a:off x="0" y="0"/>
+            <a:ext cx="9144000" cy="73152"/>
+          </a:xfrm>
+          <a:prstGeom prst="rect">
+            <a:avLst/>
+          </a:prstGeom>
+          <a:solidFill>
+            <a:srgbClr val="38BDF8"/>
+          </a:solidFill>
+          <a:ln>
+            <a:noFill/>
+          </a:ln>
+        </p:spPr>
+        <p:txBody>
+          <a:bodyPr wrap="square" lIns="182880" tIns="121920" rIns="182880" bIns="121920">
+            <a:normAutofit/>
+          </a:bodyPr>
+          <a:lstStyle/>
+          <a:p>
+            <a:pPr marL="0" indent="0">
+              <a:buNone/>
+            </a:pPr>
+            <a:r>
+              <a:rPr lang="de-DE" sz="100">
+                <a:solidFill>
+                  <a:srgbClr val="38BDF8"/>
+                </a:solidFill>
+                <a:latin typeface="Aptos"/>
+                <a:ea typeface="Aptos"/>
+                <a:cs typeface="Aptos"/>
+              </a:rPr>
+              <a:t/>
+            </a:r>
+          </a:p>
+        </p:txBody>
+      </p:sp>
+      <p:sp>
+        <p:nvSpPr>
+          <p:cNvPr id="3" name="kicker"/>
+          <p:cNvSpPr/>
+          <p:nvPr/>
+        </p:nvSpPr>
+        <p:spPr>
+          <a:xfrm>
+            <a:off x="548640" y="438912"/>
+            <a:ext cx="4200000" cy="300000"/>
+          </a:xfrm>
+          <a:prstGeom prst="rect">
+            <a:avLst/>
+          </a:prstGeom>
+          <a:noFill/>
+          <a:ln>
+            <a:noFill/>
+          </a:ln>
+        </p:spPr>
+        <p:txBody>
+          <a:bodyPr wrap="square" lIns="182880" tIns="121920" rIns="182880" bIns="121920">
+            <a:normAutofit/>
+          </a:bodyPr>
+          <a:lstStyle/>
+          <a:p>
+            <a:pPr marL="0" indent="0">
+              <a:buNone/>
+            </a:pPr>
+            <a:r>
+              <a:rPr lang="de-DE" sz="1350" b="1">
+                <a:solidFill>
+                  <a:srgbClr val="38BDF8"/>
+                </a:solidFill>
+                <a:latin typeface="Aptos"/>
+                <a:ea typeface="Aptos"/>
+                <a:cs typeface="Aptos"/>
+              </a:rPr>
+              <a:t>MODULE 3.6</a:t>
+            </a:r>
+          </a:p>
+        </p:txBody>
+      </p:sp>
+      <p:sp>
+        <p:nvSpPr>
+          <p:cNvPr id="4" name="title"/>
+          <p:cNvSpPr/>
+          <p:nvPr/>
+        </p:nvSpPr>
+        <p:spPr>
+          <a:xfrm>
+            <a:off x="548640" y="770000"/>
+            <a:ext cx="8100000" cy="720000"/>
+          </a:xfrm>
+          <a:prstGeom prst="rect">
+            <a:avLst/>
+          </a:prstGeom>
+          <a:noFill/>
+          <a:ln>
+            <a:noFill/>
+          </a:ln>
+        </p:spPr>
+        <p:txBody>
+          <a:bodyPr wrap="square" lIns="182880" tIns="121920" rIns="182880" bIns="121920">
+            <a:normAutofit/>
+          </a:bodyPr>
+          <a:lstStyle/>
+          <a:p>
+            <a:pPr marL="0" indent="0">
+              <a:buNone/>
+            </a:pPr>
+            <a:r>
+              <a:rPr lang="de-DE" sz="3900" b="1">
+                <a:solidFill>
+                  <a:srgbClr val="F8FAFC"/>
+                </a:solidFill>
+                <a:latin typeface="Aptos"/>
+                <a:ea typeface="Aptos"/>
+                <a:cs typeface="Aptos"/>
+              </a:rPr>
+              <a:t>CI/CD &amp; Headless Mode</a:t>
+            </a:r>
+          </a:p>
+        </p:txBody>
+      </p:sp>
+      <p:sp>
+        <p:nvSpPr>
+          <p:cNvPr id="5" name="subtitle"/>
+          <p:cNvSpPr/>
+          <p:nvPr/>
+        </p:nvSpPr>
+        <p:spPr>
+          <a:xfrm>
+            <a:off x="548640" y="1510000"/>
+            <a:ext cx="7900000" cy="560000"/>
+          </a:xfrm>
+          <a:prstGeom prst="rect">
+            <a:avLst/>
+          </a:prstGeom>
+          <a:noFill/>
+          <a:ln>
+            <a:noFill/>
+          </a:ln>
+        </p:spPr>
+        <p:txBody>
+          <a:bodyPr wrap="square" lIns="182880" tIns="121920" rIns="182880" bIns="121920">
+            <a:normAutofit/>
+          </a:bodyPr>
+          <a:lstStyle/>
+          <a:p>
+            <a:pPr marL="0" indent="0">
+              <a:buNone/>
+            </a:pPr>
+            <a:r>
+              <a:rPr lang="de-DE" sz="1750">
+                <a:solidFill>
+                  <a:srgbClr val="CBD5E1"/>
+                </a:solidFill>
+                <a:latin typeface="Aptos"/>
+                <a:ea typeface="Aptos"/>
+                <a:cs typeface="Aptos"/>
+              </a:rPr>
+              <a:t>Claude Code als Pipeline-Stage: JSON rein, JSON raus, Kosten gedeckelt.</a:t>
+            </a:r>
+          </a:p>
+        </p:txBody>
+      </p:sp>
+      <p:sp>
+        <p:nvSpPr>
+          <p:cNvPr id="10" name="card 1"/>
+          <p:cNvSpPr/>
+          <p:nvPr/>
+        </p:nvSpPr>
+        <p:spPr>
+          <a:xfrm>
+            <a:off x="548640" y="2320000"/>
+            <a:ext cx="2500000" cy="1540000"/>
+          </a:xfrm>
+          <a:prstGeom prst="roundRect">
+            <a:avLst/>
+          </a:prstGeom>
+          <a:solidFill>
+            <a:srgbClr val="1E293B"/>
+          </a:solidFill>
+          <a:ln w="12700">
+            <a:solidFill>
+              <a:srgbClr val="334155"/>
+            </a:solidFill>
+          </a:ln>
+        </p:spPr>
+        <p:txBody>
+          <a:bodyPr wrap="square" lIns="182880" tIns="121920" rIns="182880" bIns="121920">
+            <a:normAutofit/>
+          </a:bodyPr>
+          <a:lstStyle/>
+          <a:p>
+            <a:pPr marL="0" indent="0">
+              <a:buNone/>
+            </a:pPr>
+            <a:r>
+              <a:rPr lang="de-DE" sz="1850" b="1">
+                <a:solidFill>
+                  <a:srgbClr val="F8FAFC"/>
+                </a:solidFill>
+                <a:latin typeface="Aptos"/>
+                <a:ea typeface="Aptos"/>
+                <a:cs typeface="Aptos"/>
+              </a:rPr>
+              <a:t>claude -p</a:t>
+            </a:r>
+          </a:p>
+          <a:p>
+            <a:pPr marL="0" indent="0">
+              <a:buNone/>
+            </a:pPr>
+            <a:r>
+              <a:rPr lang="de-DE" sz="1400">
+                <a:solidFill>
+                  <a:srgbClr val="CBD5E1"/>
+                </a:solidFill>
+                <a:latin typeface="Aptos"/>
+                <a:ea typeface="Aptos"/>
+                <a:cs typeface="Aptos"/>
+              </a:rPr>
+              <a:t>Headless Prompt fuer PR-Checks, Migrationen und Audits.</a:t>
+            </a:r>
+          </a:p>
+        </p:txBody>
+      </p:sp>
+      <p:sp>
+        <p:nvSpPr>
+          <p:cNvPr id="11" name="card 2"/>
+          <p:cNvSpPr/>
+          <p:nvPr/>
+        </p:nvSpPr>
+        <p:spPr>
+          <a:xfrm>
+            <a:off x="3308640" y="2320000"/>
+            <a:ext cx="2500000" cy="1540000"/>
+          </a:xfrm>
+          <a:prstGeom prst="roundRect">
+            <a:avLst/>
+          </a:prstGeom>
+          <a:solidFill>
+            <a:srgbClr val="1E293B"/>
+          </a:solidFill>
+          <a:ln w="12700">
+            <a:solidFill>
+              <a:srgbClr val="334155"/>
+            </a:solidFill>
+          </a:ln>
+        </p:spPr>
+        <p:txBody>
+          <a:bodyPr wrap="square" lIns="182880" tIns="121920" rIns="182880" bIns="121920">
+            <a:normAutofit/>
+          </a:bodyPr>
+          <a:lstStyle/>
+          <a:p>
+            <a:pPr marL="0" indent="0">
+              <a:buNone/>
+            </a:pPr>
+            <a:r>
+              <a:rPr lang="de-DE" sz="1850" b="1">
+                <a:solidFill>
+                  <a:srgbClr val="F8FAFC"/>
+                </a:solidFill>
+                <a:latin typeface="Aptos"/>
+                <a:ea typeface="Aptos"/>
+                <a:cs typeface="Aptos"/>
+              </a:rPr>
+              <a:t>Structured Output</a:t>
+            </a:r>
+          </a:p>
+          <a:p>
+            <a:pPr marL="0" indent="0">
+              <a:buNone/>
+            </a:pPr>
+            <a:r>
+              <a:rPr lang="de-DE" sz="1400">
+                <a:solidFill>
+                  <a:srgbClr val="CBD5E1"/>
+                </a:solidFill>
+                <a:latin typeface="Aptos"/>
+                <a:ea typeface="Aptos"/>
+                <a:cs typeface="Aptos"/>
+              </a:rPr>
+              <a:t>--output-format json und Schema fuer maschinenlesbare Gates.</a:t>
+            </a:r>
+          </a:p>
+        </p:txBody>
+      </p:sp>
+      <p:sp>
+        <p:nvSpPr>
+          <p:cNvPr id="12" name="card 3"/>
+          <p:cNvSpPr/>
+          <p:nvPr/>
+        </p:nvSpPr>
+        <p:spPr>
+          <a:xfrm>
+            <a:off x="6068640" y="2320000"/>
+            <a:ext cx="2500000" cy="1540000"/>
+          </a:xfrm>
+          <a:prstGeom prst="roundRect">
+            <a:avLst/>
+          </a:prstGeom>
+          <a:solidFill>
+            <a:srgbClr val="1E293B"/>
+          </a:solidFill>
+          <a:ln w="12700">
+            <a:solidFill>
+              <a:srgbClr val="334155"/>
+            </a:solidFill>
+          </a:ln>
+        </p:spPr>
+        <p:txBody>
+          <a:bodyPr wrap="square" lIns="182880" tIns="121920" rIns="182880" bIns="121920">
+            <a:normAutofit/>
+          </a:bodyPr>
+          <a:lstStyle/>
+          <a:p>
+            <a:pPr marL="0" indent="0">
+              <a:buNone/>
+            </a:pPr>
+            <a:r>
+              <a:rPr lang="de-DE" sz="1850" b="1">
+                <a:solidFill>
+                  <a:srgbClr val="F8FAFC"/>
+                </a:solidFill>
+                <a:latin typeface="Aptos"/>
+                <a:ea typeface="Aptos"/>
+                <a:cs typeface="Aptos"/>
+              </a:rPr>
+              <a:t>Runner Security</a:t>
+            </a:r>
+          </a:p>
+          <a:p>
+            <a:pPr marL="0" indent="0">
+              <a:buNone/>
+            </a:pPr>
+            <a:r>
+              <a:rPr lang="de-DE" sz="1400">
+                <a:solidFill>
+                  <a:srgbClr val="CBD5E1"/>
+                </a:solidFill>
+                <a:latin typeface="Aptos"/>
+                <a:ea typeface="Aptos"/>
+                <a:cs typeface="Aptos"/>
+              </a:rPr>
+              <a:t>Secrets masked, Token Rotation, Bedrock/Vertex fuer Hochsicherheit.</a:t>
+            </a:r>
+          </a:p>
+        </p:txBody>
+      </p:sp>
+      <p:sp>
+        <p:nvSpPr>
+          <p:cNvPr id="30" name="footer"/>
+          <p:cNvSpPr/>
+          <p:nvPr/>
+        </p:nvSpPr>
+        <p:spPr>
+          <a:xfrm>
+            <a:off x="8050000" y="4700000"/>
+            <a:ext cx="760000" cy="260000"/>
+          </a:xfrm>
+          <a:prstGeom prst="rect">
+            <a:avLst/>
+          </a:prstGeom>
+          <a:noFill/>
+          <a:ln>
+            <a:noFill/>
+          </a:ln>
+        </p:spPr>
+        <p:txBody>
+          <a:bodyPr wrap="square" lIns="182880" tIns="121920" rIns="182880" bIns="121920">
+            <a:normAutofit/>
+          </a:bodyPr>
+          <a:lstStyle/>
+          <a:p>
+            <a:pPr marL="0" indent="0">
+              <a:buNone/>
+            </a:pPr>
+            <a:r>
+              <a:rPr lang="de-DE" sz="1100">
+                <a:solidFill>
+                  <a:srgbClr val="94A3B8"/>
+                </a:solidFill>
+                <a:latin typeface="Aptos"/>
+                <a:ea typeface="Aptos"/>
+                <a:cs typeface="Aptos"/>
+              </a:rPr>
+              <a:t>24 / 30</a:t>
+            </a:r>
+          </a:p>
+        </p:txBody>
+      </p:sp>
+    </p:spTree>
+  </p:cSld>
+  <p:clrMapOvr>
+    <a:masterClrMapping/>
+  </p:clrMapOvr>
+</p:sld>
+</file>
+
+<file path=ppt/slides/slide26.xml><?xml version="1.0" encoding="utf-8"?>
+<p:sld xmlns:a="http://schemas.openxmlformats.org/drawingml/2006/main" xmlns:r="http://schemas.openxmlformats.org/officeDocument/2006/relationships" xmlns:p="http://schemas.openxmlformats.org/presentationml/2006/main">
+  <p:cSld>
+    <p:bg>
+      <p:bgPr>
+        <a:solidFill>
+          <a:srgbClr val="0F172A"/>
+        </a:solidFill>
+        <a:effectLst/>
+      </p:bgPr>
+    </p:bg>
+    <p:spTree>
+      <p:nvGrpSpPr>
+        <p:cNvPr id="1" name="Group 1"/>
+        <p:cNvGrpSpPr/>
+        <p:nvPr/>
+      </p:nvGrpSpPr>
+      <p:grpSpPr>
+        <a:xfrm>
+          <a:off x="0" y="0"/>
+          <a:ext cx="0" cy="0"/>
+          <a:chOff x="0" y="0"/>
+          <a:chExt cx="0" cy="0"/>
+        </a:xfrm>
+      </p:grpSpPr>
+      <p:sp>
+        <p:nvSpPr>
+          <p:cNvPr id="2" name="top rule"/>
+          <p:cNvSpPr/>
+          <p:nvPr/>
+        </p:nvSpPr>
+        <p:spPr>
+          <a:xfrm>
+            <a:off x="0" y="0"/>
+            <a:ext cx="9144000" cy="73152"/>
+          </a:xfrm>
+          <a:prstGeom prst="rect">
+            <a:avLst/>
+          </a:prstGeom>
+          <a:solidFill>
+            <a:srgbClr val="38BDF8"/>
+          </a:solidFill>
+          <a:ln>
+            <a:noFill/>
+          </a:ln>
+        </p:spPr>
+        <p:txBody>
+          <a:bodyPr wrap="square" lIns="182880" tIns="121920" rIns="182880" bIns="121920">
+            <a:normAutofit/>
+          </a:bodyPr>
+          <a:lstStyle/>
+          <a:p>
+            <a:pPr marL="0" indent="0">
+              <a:buNone/>
+            </a:pPr>
+            <a:r>
+              <a:rPr lang="de-DE" sz="100">
+                <a:solidFill>
+                  <a:srgbClr val="38BDF8"/>
+                </a:solidFill>
+                <a:latin typeface="Aptos"/>
+                <a:ea typeface="Aptos"/>
+                <a:cs typeface="Aptos"/>
+              </a:rPr>
+              <a:t/>
+            </a:r>
+          </a:p>
+        </p:txBody>
+      </p:sp>
+      <p:sp>
+        <p:nvSpPr>
+          <p:cNvPr id="3" name="kicker"/>
+          <p:cNvSpPr/>
+          <p:nvPr/>
+        </p:nvSpPr>
+        <p:spPr>
+          <a:xfrm>
+            <a:off x="548640" y="438912"/>
+            <a:ext cx="4200000" cy="300000"/>
+          </a:xfrm>
+          <a:prstGeom prst="rect">
+            <a:avLst/>
+          </a:prstGeom>
+          <a:noFill/>
+          <a:ln>
+            <a:noFill/>
+          </a:ln>
+        </p:spPr>
+        <p:txBody>
+          <a:bodyPr wrap="square" lIns="182880" tIns="121920" rIns="182880" bIns="121920">
+            <a:normAutofit/>
+          </a:bodyPr>
+          <a:lstStyle/>
+          <a:p>
+            <a:pPr marL="0" indent="0">
+              <a:buNone/>
+            </a:pPr>
+            <a:r>
+              <a:rPr lang="de-DE" sz="1350" b="1">
+                <a:solidFill>
+                  <a:srgbClr val="38BDF8"/>
+                </a:solidFill>
+                <a:latin typeface="Aptos"/>
+                <a:ea typeface="Aptos"/>
+                <a:cs typeface="Aptos"/>
+              </a:rPr>
+              <a:t>MODULE 3.7</a:t>
+            </a:r>
+          </a:p>
+        </p:txBody>
+      </p:sp>
+      <p:sp>
+        <p:nvSpPr>
+          <p:cNvPr id="4" name="title"/>
+          <p:cNvSpPr/>
+          <p:nvPr/>
+        </p:nvSpPr>
+        <p:spPr>
+          <a:xfrm>
+            <a:off x="548640" y="770000"/>
+            <a:ext cx="8100000" cy="720000"/>
+          </a:xfrm>
+          <a:prstGeom prst="rect">
+            <a:avLst/>
+          </a:prstGeom>
+          <a:noFill/>
+          <a:ln>
+            <a:noFill/>
+          </a:ln>
+        </p:spPr>
+        <p:txBody>
+          <a:bodyPr wrap="square" lIns="182880" tIns="121920" rIns="182880" bIns="121920">
+            <a:normAutofit/>
+          </a:bodyPr>
+          <a:lstStyle/>
+          <a:p>
+            <a:pPr marL="0" indent="0">
+              <a:buNone/>
+            </a:pPr>
+            <a:r>
+              <a:rPr lang="de-DE" sz="3900" b="1">
+                <a:solidFill>
+                  <a:srgbClr val="F8FAFC"/>
+                </a:solidFill>
+                <a:latin typeface="Aptos"/>
+                <a:ea typeface="Aptos"/>
+                <a:cs typeface="Aptos"/>
+              </a:rPr>
+              <a:t>Troubleshooting &amp; Debugging</a:t>
+            </a:r>
+          </a:p>
+        </p:txBody>
+      </p:sp>
+      <p:sp>
+        <p:nvSpPr>
+          <p:cNvPr id="5" name="subtitle"/>
+          <p:cNvSpPr/>
+          <p:nvPr/>
+        </p:nvSpPr>
+        <p:spPr>
+          <a:xfrm>
+            <a:off x="548640" y="1510000"/>
+            <a:ext cx="7900000" cy="560000"/>
+          </a:xfrm>
+          <a:prstGeom prst="rect">
+            <a:avLst/>
+          </a:prstGeom>
+          <a:noFill/>
+          <a:ln>
+            <a:noFill/>
+          </a:ln>
+        </p:spPr>
+        <p:txBody>
+          <a:bodyPr wrap="square" lIns="182880" tIns="121920" rIns="182880" bIns="121920">
+            <a:normAutofit/>
+          </a:bodyPr>
+          <a:lstStyle/>
+          <a:p>
+            <a:pPr marL="0" indent="0">
+              <a:buNone/>
+            </a:pPr>
+            <a:r>
+              <a:rPr lang="de-DE" sz="1750">
+                <a:solidFill>
+                  <a:srgbClr val="CBD5E1"/>
+                </a:solidFill>
+                <a:latin typeface="Aptos"/>
+                <a:ea typeface="Aptos"/>
+                <a:cs typeface="Aptos"/>
+              </a:rPr>
+              <a:t>Wenn etwas bricht: erst Sichtbarkeit, dann Hypothese, dann kleinster reproduzierbarer Check.</a:t>
+            </a:r>
+          </a:p>
+        </p:txBody>
+      </p:sp>
+      <p:sp>
+        <p:nvSpPr>
+          <p:cNvPr id="10" name="card 1"/>
+          <p:cNvSpPr/>
+          <p:nvPr/>
+        </p:nvSpPr>
+        <p:spPr>
+          <a:xfrm>
+            <a:off x="548640" y="2320000"/>
+            <a:ext cx="2500000" cy="1540000"/>
+          </a:xfrm>
+          <a:prstGeom prst="roundRect">
+            <a:avLst/>
+          </a:prstGeom>
+          <a:solidFill>
+            <a:srgbClr val="1E293B"/>
+          </a:solidFill>
+          <a:ln w="12700">
+            <a:solidFill>
+              <a:srgbClr val="334155"/>
+            </a:solidFill>
+          </a:ln>
+        </p:spPr>
+        <p:txBody>
+          <a:bodyPr wrap="square" lIns="182880" tIns="121920" rIns="182880" bIns="121920">
+            <a:normAutofit/>
+          </a:bodyPr>
+          <a:lstStyle/>
+          <a:p>
+            <a:pPr marL="0" indent="0">
+              <a:buNone/>
+            </a:pPr>
+            <a:r>
+              <a:rPr lang="de-DE" sz="1850" b="1">
+                <a:solidFill>
+                  <a:srgbClr val="F8FAFC"/>
+                </a:solidFill>
+                <a:latin typeface="Aptos"/>
+                <a:ea typeface="Aptos"/>
+                <a:cs typeface="Aptos"/>
+              </a:rPr>
+              <a:t>/doctor + --verbose</a:t>
+            </a:r>
+          </a:p>
+          <a:p>
+            <a:pPr marL="0" indent="0">
+              <a:buNone/>
+            </a:pPr>
+            <a:r>
+              <a:rPr lang="de-DE" sz="1400">
+                <a:solidFill>
+                  <a:srgbClr val="CBD5E1"/>
+                </a:solidFill>
+                <a:latin typeface="Aptos"/>
+                <a:ea typeface="Aptos"/>
+                <a:cs typeface="Aptos"/>
+              </a:rPr>
+              <a:t>Umgebung, Auth, Tool-Output und Fehlerpfade sichtbar machen.</a:t>
+            </a:r>
+          </a:p>
+        </p:txBody>
+      </p:sp>
+      <p:sp>
+        <p:nvSpPr>
+          <p:cNvPr id="11" name="card 2"/>
+          <p:cNvSpPr/>
+          <p:nvPr/>
+        </p:nvSpPr>
+        <p:spPr>
+          <a:xfrm>
+            <a:off x="3308640" y="2320000"/>
+            <a:ext cx="2500000" cy="1540000"/>
+          </a:xfrm>
+          <a:prstGeom prst="roundRect">
+            <a:avLst/>
+          </a:prstGeom>
+          <a:solidFill>
+            <a:srgbClr val="1E293B"/>
+          </a:solidFill>
+          <a:ln w="12700">
+            <a:solidFill>
+              <a:srgbClr val="334155"/>
+            </a:solidFill>
+          </a:ln>
+        </p:spPr>
+        <p:txBody>
+          <a:bodyPr wrap="square" lIns="182880" tIns="121920" rIns="182880" bIns="121920">
+            <a:normAutofit/>
+          </a:bodyPr>
+          <a:lstStyle/>
+          <a:p>
+            <a:pPr marL="0" indent="0">
+              <a:buNone/>
+            </a:pPr>
+            <a:r>
+              <a:rPr lang="de-DE" sz="1850" b="1">
+                <a:solidFill>
+                  <a:srgbClr val="F8FAFC"/>
+                </a:solidFill>
+                <a:latin typeface="Aptos"/>
+                <a:ea typeface="Aptos"/>
+                <a:cs typeface="Aptos"/>
+              </a:rPr>
+              <a:t>Hook Debugging</a:t>
+            </a:r>
+          </a:p>
+          <a:p>
+            <a:pPr marL="0" indent="0">
+              <a:buNone/>
+            </a:pPr>
+            <a:r>
+              <a:rPr lang="de-DE" sz="1400">
+                <a:solidFill>
+                  <a:srgbClr val="CBD5E1"/>
+                </a:solidFill>
+                <a:latin typeface="Aptos"/>
+                <a:ea typeface="Aptos"/>
+                <a:cs typeface="Aptos"/>
+              </a:rPr>
+              <a:t>Exit Codes, Matcher, JSON und Timing getrennt pruefen.</a:t>
+            </a:r>
+          </a:p>
+        </p:txBody>
+      </p:sp>
+      <p:sp>
+        <p:nvSpPr>
+          <p:cNvPr id="12" name="card 3"/>
+          <p:cNvSpPr/>
+          <p:nvPr/>
+        </p:nvSpPr>
+        <p:spPr>
+          <a:xfrm>
+            <a:off x="6068640" y="2320000"/>
+            <a:ext cx="2500000" cy="1540000"/>
+          </a:xfrm>
+          <a:prstGeom prst="roundRect">
+            <a:avLst/>
+          </a:prstGeom>
+          <a:solidFill>
+            <a:srgbClr val="1E293B"/>
+          </a:solidFill>
+          <a:ln w="12700">
+            <a:solidFill>
+              <a:srgbClr val="334155"/>
+            </a:solidFill>
+          </a:ln>
+        </p:spPr>
+        <p:txBody>
+          <a:bodyPr wrap="square" lIns="182880" tIns="121920" rIns="182880" bIns="121920">
+            <a:normAutofit/>
+          </a:bodyPr>
+          <a:lstStyle/>
+          <a:p>
+            <a:pPr marL="0" indent="0">
+              <a:buNone/>
+            </a:pPr>
+            <a:r>
+              <a:rPr lang="de-DE" sz="1850" b="1">
+                <a:solidFill>
+                  <a:srgbClr val="F8FAFC"/>
+                </a:solidFill>
+                <a:latin typeface="Aptos"/>
+                <a:ea typeface="Aptos"/>
+                <a:cs typeface="Aptos"/>
+              </a:rPr>
+              <a:t>Memory Drift</a:t>
+            </a:r>
+          </a:p>
+          <a:p>
+            <a:pPr marL="0" indent="0">
+              <a:buNone/>
+            </a:pPr>
+            <a:r>
+              <a:rPr lang="de-DE" sz="1400">
+                <a:solidFill>
+                  <a:srgbClr val="CBD5E1"/>
+                </a:solidFill>
+                <a:latin typeface="Aptos"/>
+                <a:ea typeface="Aptos"/>
+                <a:cs typeface="Aptos"/>
+              </a:rPr>
+              <a:t>Auto-Memory lesen, Quellen trennen, stale Regeln entfernen.</a:t>
+            </a:r>
+          </a:p>
+        </p:txBody>
+      </p:sp>
+      <p:sp>
+        <p:nvSpPr>
+          <p:cNvPr id="30" name="footer"/>
+          <p:cNvSpPr/>
+          <p:nvPr/>
+        </p:nvSpPr>
+        <p:spPr>
+          <a:xfrm>
+            <a:off x="8050000" y="4700000"/>
+            <a:ext cx="760000" cy="260000"/>
+          </a:xfrm>
+          <a:prstGeom prst="rect">
+            <a:avLst/>
+          </a:prstGeom>
+          <a:noFill/>
+          <a:ln>
+            <a:noFill/>
+          </a:ln>
+        </p:spPr>
+        <p:txBody>
+          <a:bodyPr wrap="square" lIns="182880" tIns="121920" rIns="182880" bIns="121920">
+            <a:normAutofit/>
+          </a:bodyPr>
+          <a:lstStyle/>
+          <a:p>
+            <a:pPr marL="0" indent="0">
+              <a:buNone/>
+            </a:pPr>
+            <a:r>
+              <a:rPr lang="de-DE" sz="1100">
+                <a:solidFill>
+                  <a:srgbClr val="94A3B8"/>
+                </a:solidFill>
+                <a:latin typeface="Aptos"/>
+                <a:ea typeface="Aptos"/>
+                <a:cs typeface="Aptos"/>
+              </a:rPr>
+              <a:t>25 / 30</a:t>
+            </a:r>
+          </a:p>
+        </p:txBody>
+      </p:sp>
+    </p:spTree>
+  </p:cSld>
+  <p:clrMapOvr>
+    <a:masterClrMapping/>
+  </p:clrMapOvr>
+</p:sld>
+</file>
+
+<file path=ppt/slides/slide27.xml><?xml version="1.0" encoding="utf-8"?>
+<p:sld xmlns:a="http://schemas.openxmlformats.org/drawingml/2006/main" xmlns:r="http://schemas.openxmlformats.org/officeDocument/2006/relationships" xmlns:p="http://schemas.openxmlformats.org/presentationml/2006/main">
+  <p:cSld>
+    <p:bg>
+      <p:bgPr>
+        <a:solidFill>
+          <a:srgbClr val="0F172A"/>
+        </a:solidFill>
+        <a:effectLst/>
+      </p:bgPr>
+    </p:bg>
+    <p:spTree>
+      <p:nvGrpSpPr>
+        <p:cNvPr id="1" name="Group 1"/>
+        <p:cNvGrpSpPr/>
+        <p:nvPr/>
+      </p:nvGrpSpPr>
+      <p:grpSpPr>
+        <a:xfrm>
+          <a:off x="0" y="0"/>
+          <a:ext cx="0" cy="0"/>
+          <a:chOff x="0" y="0"/>
+          <a:chExt cx="0" cy="0"/>
+        </a:xfrm>
+      </p:grpSpPr>
+      <p:sp>
+        <p:nvSpPr>
+          <p:cNvPr id="2" name="top rule"/>
+          <p:cNvSpPr/>
+          <p:nvPr/>
+        </p:nvSpPr>
+        <p:spPr>
+          <a:xfrm>
+            <a:off x="0" y="0"/>
+            <a:ext cx="9144000" cy="73152"/>
+          </a:xfrm>
+          <a:prstGeom prst="rect">
+            <a:avLst/>
+          </a:prstGeom>
+          <a:solidFill>
+            <a:srgbClr val="38BDF8"/>
+          </a:solidFill>
+          <a:ln>
+            <a:noFill/>
+          </a:ln>
+        </p:spPr>
+        <p:txBody>
+          <a:bodyPr wrap="square" lIns="182880" tIns="121920" rIns="182880" bIns="121920">
+            <a:normAutofit/>
+          </a:bodyPr>
+          <a:lstStyle/>
+          <a:p>
+            <a:pPr marL="0" indent="0">
+              <a:buNone/>
+            </a:pPr>
+            <a:r>
+              <a:rPr lang="de-DE" sz="100">
+                <a:solidFill>
+                  <a:srgbClr val="38BDF8"/>
+                </a:solidFill>
+                <a:latin typeface="Aptos"/>
+                <a:ea typeface="Aptos"/>
+                <a:cs typeface="Aptos"/>
+              </a:rPr>
+              <a:t/>
+            </a:r>
+          </a:p>
+        </p:txBody>
+      </p:sp>
+      <p:sp>
+        <p:nvSpPr>
+          <p:cNvPr id="3" name="kicker"/>
+          <p:cNvSpPr/>
+          <p:nvPr/>
+        </p:nvSpPr>
+        <p:spPr>
+          <a:xfrm>
+            <a:off x="548640" y="438912"/>
+            <a:ext cx="4200000" cy="300000"/>
+          </a:xfrm>
+          <a:prstGeom prst="rect">
+            <a:avLst/>
+          </a:prstGeom>
+          <a:noFill/>
+          <a:ln>
+            <a:noFill/>
+          </a:ln>
+        </p:spPr>
+        <p:txBody>
+          <a:bodyPr wrap="square" lIns="182880" tIns="121920" rIns="182880" bIns="121920">
+            <a:normAutofit/>
+          </a:bodyPr>
+          <a:lstStyle/>
+          <a:p>
+            <a:pPr marL="0" indent="0">
+              <a:buNone/>
+            </a:pPr>
+            <a:r>
+              <a:rPr lang="de-DE" sz="1350" b="1">
+                <a:solidFill>
+                  <a:srgbClr val="38BDF8"/>
+                </a:solidFill>
+                <a:latin typeface="Aptos"/>
+                <a:ea typeface="Aptos"/>
+                <a:cs typeface="Aptos"/>
+              </a:rPr>
+              <a:t>MODULE 3.5</a:t>
+            </a:r>
+          </a:p>
+        </p:txBody>
+      </p:sp>
+      <p:sp>
+        <p:nvSpPr>
+          <p:cNvPr id="4" name="title"/>
+          <p:cNvSpPr/>
+          <p:nvPr/>
+        </p:nvSpPr>
+        <p:spPr>
+          <a:xfrm>
+            <a:off x="548640" y="770000"/>
+            <a:ext cx="8100000" cy="720000"/>
+          </a:xfrm>
+          <a:prstGeom prst="rect">
+            <a:avLst/>
+          </a:prstGeom>
+          <a:noFill/>
+          <a:ln>
+            <a:noFill/>
+          </a:ln>
+        </p:spPr>
+        <p:txBody>
+          <a:bodyPr wrap="square" lIns="182880" tIns="121920" rIns="182880" bIns="121920">
+            <a:normAutofit/>
+          </a:bodyPr>
+          <a:lstStyle/>
+          <a:p>
+            <a:pPr marL="0" indent="0">
+              <a:buNone/>
+            </a:pPr>
+            <a:r>
+              <a:rPr lang="de-DE" sz="3900" b="1">
+                <a:solidFill>
+                  <a:srgbClr val="F8FAFC"/>
+                </a:solidFill>
+                <a:latin typeface="Aptos"/>
+                <a:ea typeface="Aptos"/>
+                <a:cs typeface="Aptos"/>
+              </a:rPr>
+              <a:t>Capstone: Workflow Architecture</a:t>
+            </a:r>
+          </a:p>
+        </p:txBody>
+      </p:sp>
+      <p:sp>
+        <p:nvSpPr>
+          <p:cNvPr id="5" name="subtitle"/>
+          <p:cNvSpPr/>
+          <p:nvPr/>
+        </p:nvSpPr>
+        <p:spPr>
+          <a:xfrm>
+            <a:off x="548640" y="1510000"/>
+            <a:ext cx="7900000" cy="560000"/>
+          </a:xfrm>
+          <a:prstGeom prst="rect">
+            <a:avLst/>
+          </a:prstGeom>
+          <a:noFill/>
+          <a:ln>
+            <a:noFill/>
+          </a:ln>
+        </p:spPr>
+        <p:txBody>
+          <a:bodyPr wrap="square" lIns="182880" tIns="121920" rIns="182880" bIns="121920">
+            <a:normAutofit/>
+          </a:bodyPr>
+          <a:lstStyle/>
+          <a:p>
+            <a:pPr marL="0" indent="0">
+              <a:buNone/>
+            </a:pPr>
+            <a:r>
+              <a:rPr lang="de-DE" sz="1750">
+                <a:solidFill>
+                  <a:srgbClr val="CBD5E1"/>
+                </a:solidFill>
+                <a:latin typeface="Aptos"/>
+                <a:ea typeface="Aptos"/>
+                <a:cs typeface="Aptos"/>
+              </a:rPr>
+              <a:t>Die Teilnehmer entwerfen ihren eigenen Agenten-Workflow fuer ein Physical-Security-Szenario.</a:t>
+            </a:r>
+          </a:p>
+        </p:txBody>
+      </p:sp>
+      <p:sp>
+        <p:nvSpPr>
+          <p:cNvPr id="10" name="card 1"/>
+          <p:cNvSpPr/>
+          <p:nvPr/>
+        </p:nvSpPr>
+        <p:spPr>
+          <a:xfrm>
+            <a:off x="548640" y="2320000"/>
+            <a:ext cx="2500000" cy="1540000"/>
+          </a:xfrm>
+          <a:prstGeom prst="roundRect">
+            <a:avLst/>
+          </a:prstGeom>
+          <a:solidFill>
+            <a:srgbClr val="1E293B"/>
+          </a:solidFill>
+          <a:ln w="12700">
+            <a:solidFill>
+              <a:srgbClr val="334155"/>
+            </a:solidFill>
+          </a:ln>
+        </p:spPr>
+        <p:txBody>
+          <a:bodyPr wrap="square" lIns="182880" tIns="121920" rIns="182880" bIns="121920">
+            <a:normAutofit/>
+          </a:bodyPr>
+          <a:lstStyle/>
+          <a:p>
+            <a:pPr marL="0" indent="0">
+              <a:buNone/>
+            </a:pPr>
+            <a:r>
+              <a:rPr lang="de-DE" sz="1850" b="1">
+                <a:solidFill>
+                  <a:srgbClr val="F8FAFC"/>
+                </a:solidFill>
+                <a:latin typeface="Aptos"/>
+                <a:ea typeface="Aptos"/>
+                <a:cs typeface="Aptos"/>
+              </a:rPr>
+              <a:t>Whiteboard zuerst</a:t>
+            </a:r>
+          </a:p>
+          <a:p>
+            <a:pPr marL="0" indent="0">
+              <a:buNone/>
+            </a:pPr>
+            <a:r>
+              <a:rPr lang="de-DE" sz="1400">
+                <a:solidFill>
+                  <a:srgbClr val="CBD5E1"/>
+                </a:solidFill>
+                <a:latin typeface="Aptos"/>
+                <a:ea typeface="Aptos"/>
+                <a:cs typeface="Aptos"/>
+              </a:rPr>
+              <a:t>System, Grenzen, Freigaben, Logs und Eskalation zeichnen.</a:t>
+            </a:r>
+          </a:p>
+        </p:txBody>
+      </p:sp>
+      <p:sp>
+        <p:nvSpPr>
+          <p:cNvPr id="11" name="card 2"/>
+          <p:cNvSpPr/>
+          <p:nvPr/>
+        </p:nvSpPr>
+        <p:spPr>
+          <a:xfrm>
+            <a:off x="3308640" y="2320000"/>
+            <a:ext cx="2500000" cy="1540000"/>
+          </a:xfrm>
+          <a:prstGeom prst="roundRect">
+            <a:avLst/>
+          </a:prstGeom>
+          <a:solidFill>
+            <a:srgbClr val="1E293B"/>
+          </a:solidFill>
+          <a:ln w="12700">
+            <a:solidFill>
+              <a:srgbClr val="334155"/>
+            </a:solidFill>
+          </a:ln>
+        </p:spPr>
+        <p:txBody>
+          <a:bodyPr wrap="square" lIns="182880" tIns="121920" rIns="182880" bIns="121920">
+            <a:normAutofit/>
+          </a:bodyPr>
+          <a:lstStyle/>
+          <a:p>
+            <a:pPr marL="0" indent="0">
+              <a:buNone/>
+            </a:pPr>
+            <a:r>
+              <a:rPr lang="de-DE" sz="1850" b="1">
+                <a:solidFill>
+                  <a:srgbClr val="F8FAFC"/>
+                </a:solidFill>
+                <a:latin typeface="Aptos"/>
+                <a:ea typeface="Aptos"/>
+                <a:cs typeface="Aptos"/>
+              </a:rPr>
+              <a:t>Remote optional</a:t>
+            </a:r>
+          </a:p>
+          <a:p>
+            <a:pPr marL="0" indent="0">
+              <a:buNone/>
+            </a:pPr>
+            <a:r>
+              <a:rPr lang="de-DE" sz="1400">
+                <a:solidFill>
+                  <a:srgbClr val="CBD5E1"/>
+                </a:solidFill>
+                <a:latin typeface="Aptos"/>
+                <a:ea typeface="Aptos"/>
+                <a:cs typeface="Aptos"/>
+              </a:rPr>
+              <a:t>/remote-control zeigen, Telegram nur als Bonus.</a:t>
+            </a:r>
+          </a:p>
+        </p:txBody>
+      </p:sp>
+      <p:sp>
+        <p:nvSpPr>
+          <p:cNvPr id="12" name="card 3"/>
+          <p:cNvSpPr/>
+          <p:nvPr/>
+        </p:nvSpPr>
+        <p:spPr>
+          <a:xfrm>
+            <a:off x="6068640" y="2320000"/>
+            <a:ext cx="2500000" cy="1540000"/>
+          </a:xfrm>
+          <a:prstGeom prst="roundRect">
+            <a:avLst/>
+          </a:prstGeom>
+          <a:solidFill>
+            <a:srgbClr val="1E293B"/>
+          </a:solidFill>
+          <a:ln w="12700">
+            <a:solidFill>
+              <a:srgbClr val="334155"/>
+            </a:solidFill>
+          </a:ln>
+        </p:spPr>
+        <p:txBody>
+          <a:bodyPr wrap="square" lIns="182880" tIns="121920" rIns="182880" bIns="121920">
+            <a:normAutofit/>
+          </a:bodyPr>
+          <a:lstStyle/>
+          <a:p>
+            <a:pPr marL="0" indent="0">
+              <a:buNone/>
+            </a:pPr>
+            <a:r>
+              <a:rPr lang="de-DE" sz="1850" b="1">
+                <a:solidFill>
+                  <a:srgbClr val="F8FAFC"/>
+                </a:solidFill>
+                <a:latin typeface="Aptos"/>
+                <a:ea typeface="Aptos"/>
+                <a:cs typeface="Aptos"/>
+              </a:rPr>
+              <a:t>Worktrees</a:t>
+            </a:r>
+          </a:p>
+          <a:p>
+            <a:pPr marL="0" indent="0">
+              <a:buNone/>
+            </a:pPr>
+            <a:r>
+              <a:rPr lang="de-DE" sz="1400">
+                <a:solidFill>
+                  <a:srgbClr val="CBD5E1"/>
+                </a:solidFill>
+                <a:latin typeface="Aptos"/>
+                <a:ea typeface="Aptos"/>
+                <a:cs typeface="Aptos"/>
+              </a:rPr>
+              <a:t>Parallelisierung ohne das Hauptprojekt zu beschaedigen.</a:t>
+            </a:r>
+          </a:p>
+        </p:txBody>
+      </p:sp>
+      <p:sp>
+        <p:nvSpPr>
+          <p:cNvPr id="30" name="footer"/>
+          <p:cNvSpPr/>
+          <p:nvPr/>
+        </p:nvSpPr>
+        <p:spPr>
+          <a:xfrm>
+            <a:off x="8050000" y="4700000"/>
+            <a:ext cx="760000" cy="260000"/>
+          </a:xfrm>
+          <a:prstGeom prst="rect">
+            <a:avLst/>
+          </a:prstGeom>
+          <a:noFill/>
+          <a:ln>
+            <a:noFill/>
+          </a:ln>
+        </p:spPr>
+        <p:txBody>
+          <a:bodyPr wrap="square" lIns="182880" tIns="121920" rIns="182880" bIns="121920">
+            <a:normAutofit/>
+          </a:bodyPr>
+          <a:lstStyle/>
+          <a:p>
+            <a:pPr marL="0" indent="0">
+              <a:buNone/>
+            </a:pPr>
+            <a:r>
+              <a:rPr lang="de-DE" sz="1100">
+                <a:solidFill>
+                  <a:srgbClr val="94A3B8"/>
+                </a:solidFill>
+                <a:latin typeface="Aptos"/>
+                <a:ea typeface="Aptos"/>
+                <a:cs typeface="Aptos"/>
+              </a:rPr>
+              <a:t>26 / 30</a:t>
+            </a:r>
+          </a:p>
+        </p:txBody>
+      </p:sp>
+    </p:spTree>
+  </p:cSld>
+  <p:clrMapOvr>
+    <a:masterClrMapping/>
+  </p:clrMapOvr>
+</p:sld>
+</file>
+
+<file path=ppt/slides/slide28.xml><?xml version="1.0" encoding="utf-8"?>
+<p:sld xmlns:a="http://schemas.openxmlformats.org/drawingml/2006/main" xmlns:r="http://schemas.openxmlformats.org/officeDocument/2006/relationships" xmlns:p="http://schemas.openxmlformats.org/presentationml/2006/main">
+  <p:cSld>
+    <p:bg>
+      <p:bgPr>
+        <a:solidFill>
+          <a:srgbClr val="0F172A"/>
+        </a:solidFill>
+        <a:effectLst/>
+      </p:bgPr>
+    </p:bg>
+    <p:spTree>
+      <p:nvGrpSpPr>
+        <p:cNvPr id="1" name="Group 1"/>
+        <p:cNvGrpSpPr/>
+        <p:nvPr/>
+      </p:nvGrpSpPr>
+      <p:grpSpPr>
+        <a:xfrm>
+          <a:off x="0" y="0"/>
+          <a:ext cx="0" cy="0"/>
+          <a:chOff x="0" y="0"/>
+          <a:chExt cx="0" cy="0"/>
+        </a:xfrm>
+      </p:grpSpPr>
+      <p:sp>
+        <p:nvSpPr>
+          <p:cNvPr id="2" name="top rule"/>
+          <p:cNvSpPr/>
+          <p:nvPr/>
+        </p:nvSpPr>
+        <p:spPr>
+          <a:xfrm>
+            <a:off x="0" y="0"/>
+            <a:ext cx="9144000" cy="73152"/>
+          </a:xfrm>
+          <a:prstGeom prst="rect">
+            <a:avLst/>
+          </a:prstGeom>
+          <a:solidFill>
+            <a:srgbClr val="38BDF8"/>
+          </a:solidFill>
+          <a:ln>
+            <a:noFill/>
+          </a:ln>
+        </p:spPr>
+        <p:txBody>
+          <a:bodyPr wrap="square" lIns="182880" tIns="121920" rIns="182880" bIns="121920">
+            <a:normAutofit/>
+          </a:bodyPr>
+          <a:lstStyle/>
+          <a:p>
+            <a:pPr marL="0" indent="0">
+              <a:buNone/>
+            </a:pPr>
+            <a:r>
+              <a:rPr lang="de-DE" sz="100">
+                <a:solidFill>
+                  <a:srgbClr val="38BDF8"/>
+                </a:solidFill>
+                <a:latin typeface="Aptos"/>
+                <a:ea typeface="Aptos"/>
+                <a:cs typeface="Aptos"/>
+              </a:rPr>
+              <a:t/>
+            </a:r>
+          </a:p>
+        </p:txBody>
+      </p:sp>
+      <p:sp>
+        <p:nvSpPr>
+          <p:cNvPr id="3" name="kicker"/>
+          <p:cNvSpPr/>
+          <p:nvPr/>
+        </p:nvSpPr>
+        <p:spPr>
+          <a:xfrm>
+            <a:off x="548640" y="438912"/>
+            <a:ext cx="4200000" cy="300000"/>
+          </a:xfrm>
+          <a:prstGeom prst="rect">
+            <a:avLst/>
+          </a:prstGeom>
+          <a:noFill/>
+          <a:ln>
+            <a:noFill/>
+          </a:ln>
+        </p:spPr>
+        <p:txBody>
+          <a:bodyPr wrap="square" lIns="182880" tIns="121920" rIns="182880" bIns="121920">
+            <a:normAutofit/>
+          </a:bodyPr>
+          <a:lstStyle/>
+          <a:p>
+            <a:pPr marL="0" indent="0">
+              <a:buNone/>
+            </a:pPr>
+            <a:r>
+              <a:rPr lang="de-DE" sz="1350" b="1">
+                <a:solidFill>
+                  <a:srgbClr val="38BDF8"/>
+                </a:solidFill>
+                <a:latin typeface="Aptos"/>
+                <a:ea typeface="Aptos"/>
+                <a:cs typeface="Aptos"/>
+              </a:rPr>
+              <a:t>SESSION 3 RUN SHEET</a:t>
+            </a:r>
+          </a:p>
+        </p:txBody>
+      </p:sp>
+      <p:sp>
+        <p:nvSpPr>
+          <p:cNvPr id="4" name="title"/>
+          <p:cNvSpPr/>
+          <p:nvPr/>
+        </p:nvSpPr>
+        <p:spPr>
+          <a:xfrm>
+            <a:off x="548640" y="770000"/>
+            <a:ext cx="8100000" cy="720000"/>
+          </a:xfrm>
+          <a:prstGeom prst="rect">
+            <a:avLst/>
+          </a:prstGeom>
+          <a:noFill/>
+          <a:ln>
+            <a:noFill/>
+          </a:ln>
+        </p:spPr>
+        <p:txBody>
+          <a:bodyPr wrap="square" lIns="182880" tIns="121920" rIns="182880" bIns="121920">
+            <a:normAutofit/>
+          </a:bodyPr>
+          <a:lstStyle/>
+          <a:p>
+            <a:pPr marL="0" indent="0">
+              <a:buNone/>
+            </a:pPr>
+            <a:r>
+              <a:rPr lang="de-DE" sz="3900" b="1">
+                <a:solidFill>
+                  <a:srgbClr val="F8FAFC"/>
+                </a:solidFill>
+                <a:latin typeface="Aptos"/>
+                <a:ea typeface="Aptos"/>
+                <a:cs typeface="Aptos"/>
+              </a:rPr>
+              <a:t>Didaktische Reihenfolge</a:t>
+            </a:r>
+          </a:p>
+        </p:txBody>
+      </p:sp>
+      <p:sp>
+        <p:nvSpPr>
+          <p:cNvPr id="5" name="subtitle"/>
+          <p:cNvSpPr/>
+          <p:nvPr/>
+        </p:nvSpPr>
+        <p:spPr>
+          <a:xfrm>
+            <a:off x="548640" y="1510000"/>
+            <a:ext cx="7900000" cy="560000"/>
+          </a:xfrm>
+          <a:prstGeom prst="rect">
+            <a:avLst/>
+          </a:prstGeom>
+          <a:noFill/>
+          <a:ln>
+            <a:noFill/>
+          </a:ln>
+        </p:spPr>
+        <p:txBody>
+          <a:bodyPr wrap="square" lIns="182880" tIns="121920" rIns="182880" bIns="121920">
+            <a:normAutofit/>
+          </a:bodyPr>
+          <a:lstStyle/>
+          <a:p>
+            <a:pPr marL="0" indent="0">
+              <a:buNone/>
+            </a:pPr>
+            <a:r>
+              <a:rPr lang="de-DE" sz="1750">
+                <a:solidFill>
+                  <a:srgbClr val="CBD5E1"/>
+                </a:solidFill>
+                <a:latin typeface="Aptos"/>
+                <a:ea typeface="Aptos"/>
+                <a:cs typeface="Aptos"/>
+              </a:rPr>
+              <a:t>Die neue Sequenz bringt Produktion und Debugging vor den Capstone.</a:t>
+            </a:r>
+          </a:p>
+        </p:txBody>
+      </p:sp>
+      <p:sp>
+        <p:nvSpPr>
+          <p:cNvPr id="10" name="card 1"/>
+          <p:cNvSpPr/>
+          <p:nvPr/>
+        </p:nvSpPr>
+        <p:spPr>
+          <a:xfrm>
+            <a:off x="548640" y="2320000"/>
+            <a:ext cx="2500000" cy="1540000"/>
+          </a:xfrm>
+          <a:prstGeom prst="roundRect">
+            <a:avLst/>
+          </a:prstGeom>
+          <a:solidFill>
+            <a:srgbClr val="1E293B"/>
+          </a:solidFill>
+          <a:ln w="12700">
+            <a:solidFill>
+              <a:srgbClr val="334155"/>
+            </a:solidFill>
+          </a:ln>
+        </p:spPr>
+        <p:txBody>
+          <a:bodyPr wrap="square" lIns="182880" tIns="121920" rIns="182880" bIns="121920">
+            <a:normAutofit/>
+          </a:bodyPr>
+          <a:lstStyle/>
+          <a:p>
+            <a:pPr marL="0" indent="0">
+              <a:buNone/>
+            </a:pPr>
+            <a:r>
+              <a:rPr lang="de-DE" sz="1850" b="1">
+                <a:solidFill>
+                  <a:srgbClr val="F8FAFC"/>
+                </a:solidFill>
+                <a:latin typeface="Aptos"/>
+                <a:ea typeface="Aptos"/>
+                <a:cs typeface="Aptos"/>
+              </a:rPr>
+              <a:t>0:00-1:20</a:t>
+            </a:r>
+          </a:p>
+          <a:p>
+            <a:pPr marL="0" indent="0">
+              <a:buNone/>
+            </a:pPr>
+            <a:r>
+              <a:rPr lang="de-DE" sz="1400">
+                <a:solidFill>
+                  <a:srgbClr val="CBD5E1"/>
+                </a:solidFill>
+                <a:latin typeface="Aptos"/>
+                <a:ea typeface="Aptos"/>
+                <a:cs typeface="Aptos"/>
+              </a:rPr>
+              <a:t>Agents, Multi-Model, Security, Automation.</a:t>
+            </a:r>
+          </a:p>
+        </p:txBody>
+      </p:sp>
+      <p:sp>
+        <p:nvSpPr>
+          <p:cNvPr id="11" name="card 2"/>
+          <p:cNvSpPr/>
+          <p:nvPr/>
+        </p:nvSpPr>
+        <p:spPr>
+          <a:xfrm>
+            <a:off x="3308640" y="2320000"/>
+            <a:ext cx="2500000" cy="1540000"/>
+          </a:xfrm>
+          <a:prstGeom prst="roundRect">
+            <a:avLst/>
+          </a:prstGeom>
+          <a:solidFill>
+            <a:srgbClr val="1E293B"/>
+          </a:solidFill>
+          <a:ln w="12700">
+            <a:solidFill>
+              <a:srgbClr val="334155"/>
+            </a:solidFill>
+          </a:ln>
+        </p:spPr>
+        <p:txBody>
+          <a:bodyPr wrap="square" lIns="182880" tIns="121920" rIns="182880" bIns="121920">
+            <a:normAutofit/>
+          </a:bodyPr>
+          <a:lstStyle/>
+          <a:p>
+            <a:pPr marL="0" indent="0">
+              <a:buNone/>
+            </a:pPr>
+            <a:r>
+              <a:rPr lang="de-DE" sz="1850" b="1">
+                <a:solidFill>
+                  <a:srgbClr val="F8FAFC"/>
+                </a:solidFill>
+                <a:latin typeface="Aptos"/>
+                <a:ea typeface="Aptos"/>
+                <a:cs typeface="Aptos"/>
+              </a:rPr>
+              <a:t>1:35-2:05</a:t>
+            </a:r>
+          </a:p>
+          <a:p>
+            <a:pPr marL="0" indent="0">
+              <a:buNone/>
+            </a:pPr>
+            <a:r>
+              <a:rPr lang="de-DE" sz="1400">
+                <a:solidFill>
+                  <a:srgbClr val="CBD5E1"/>
+                </a:solidFill>
+                <a:latin typeface="Aptos"/>
+                <a:ea typeface="Aptos"/>
+                <a:cs typeface="Aptos"/>
+              </a:rPr>
+              <a:t>CI/CD und Troubleshooting als Produktionsbruecke.</a:t>
+            </a:r>
+          </a:p>
+        </p:txBody>
+      </p:sp>
+      <p:sp>
+        <p:nvSpPr>
+          <p:cNvPr id="12" name="card 3"/>
+          <p:cNvSpPr/>
+          <p:nvPr/>
+        </p:nvSpPr>
+        <p:spPr>
+          <a:xfrm>
+            <a:off x="6068640" y="2320000"/>
+            <a:ext cx="2500000" cy="1540000"/>
+          </a:xfrm>
+          <a:prstGeom prst="roundRect">
+            <a:avLst/>
+          </a:prstGeom>
+          <a:solidFill>
+            <a:srgbClr val="1E293B"/>
+          </a:solidFill>
+          <a:ln w="12700">
+            <a:solidFill>
+              <a:srgbClr val="334155"/>
+            </a:solidFill>
+          </a:ln>
+        </p:spPr>
+        <p:txBody>
+          <a:bodyPr wrap="square" lIns="182880" tIns="121920" rIns="182880" bIns="121920">
+            <a:normAutofit/>
+          </a:bodyPr>
+          <a:lstStyle/>
+          <a:p>
+            <a:pPr marL="0" indent="0">
+              <a:buNone/>
+            </a:pPr>
+            <a:r>
+              <a:rPr lang="de-DE" sz="1850" b="1">
+                <a:solidFill>
+                  <a:srgbClr val="F8FAFC"/>
+                </a:solidFill>
+                <a:latin typeface="Aptos"/>
+                <a:ea typeface="Aptos"/>
+                <a:cs typeface="Aptos"/>
+              </a:rPr>
+              <a:t>2:05-3:00</a:t>
+            </a:r>
+          </a:p>
+          <a:p>
+            <a:pPr marL="0" indent="0">
+              <a:buNone/>
+            </a:pPr>
+            <a:r>
+              <a:rPr lang="de-DE" sz="1400">
+                <a:solidFill>
+                  <a:srgbClr val="CBD5E1"/>
+                </a:solidFill>
+                <a:latin typeface="Aptos"/>
+                <a:ea typeface="Aptos"/>
+                <a:cs typeface="Aptos"/>
+              </a:rPr>
+              <a:t>Capstone: Architecture Discussion mit klaren Guardrails.</a:t>
+            </a:r>
+          </a:p>
+        </p:txBody>
+      </p:sp>
+      <p:sp>
+        <p:nvSpPr>
+          <p:cNvPr id="30" name="footer"/>
+          <p:cNvSpPr/>
+          <p:nvPr/>
+        </p:nvSpPr>
+        <p:spPr>
+          <a:xfrm>
+            <a:off x="8050000" y="4700000"/>
+            <a:ext cx="760000" cy="260000"/>
+          </a:xfrm>
+          <a:prstGeom prst="rect">
+            <a:avLst/>
+          </a:prstGeom>
+          <a:noFill/>
+          <a:ln>
+            <a:noFill/>
+          </a:ln>
+        </p:spPr>
+        <p:txBody>
+          <a:bodyPr wrap="square" lIns="182880" tIns="121920" rIns="182880" bIns="121920">
+            <a:normAutofit/>
+          </a:bodyPr>
+          <a:lstStyle/>
+          <a:p>
+            <a:pPr marL="0" indent="0">
+              <a:buNone/>
+            </a:pPr>
+            <a:r>
+              <a:rPr lang="de-DE" sz="1100">
+                <a:solidFill>
+                  <a:srgbClr val="94A3B8"/>
+                </a:solidFill>
+                <a:latin typeface="Aptos"/>
+                <a:ea typeface="Aptos"/>
+                <a:cs typeface="Aptos"/>
+              </a:rPr>
+              <a:t>27 / 30</a:t>
+            </a:r>
+          </a:p>
+        </p:txBody>
+      </p:sp>
+    </p:spTree>
+  </p:cSld>
+  <p:clrMapOvr>
+    <a:masterClrMapping/>
+  </p:clrMapOvr>
+</p:sld>
+</file>
+
+<file path=ppt/slides/slide29.xml><?xml version="1.0" encoding="utf-8"?>
+<p:sld xmlns:a="http://schemas.openxmlformats.org/drawingml/2006/main" xmlns:r="http://schemas.openxmlformats.org/officeDocument/2006/relationships" xmlns:p="http://schemas.openxmlformats.org/presentationml/2006/main">
+  <p:cSld>
+    <p:bg>
+      <p:bgPr>
+        <a:solidFill>
+          <a:srgbClr val="0F172A"/>
+        </a:solidFill>
+        <a:effectLst/>
+      </p:bgPr>
+    </p:bg>
+    <p:spTree>
+      <p:nvGrpSpPr>
+        <p:cNvPr id="1" name="Group 1"/>
+        <p:cNvGrpSpPr/>
+        <p:nvPr/>
+      </p:nvGrpSpPr>
+      <p:grpSpPr>
+        <a:xfrm>
+          <a:off x="0" y="0"/>
+          <a:ext cx="0" cy="0"/>
+          <a:chOff x="0" y="0"/>
+          <a:chExt cx="0" cy="0"/>
+        </a:xfrm>
+      </p:grpSpPr>
+      <p:sp>
+        <p:nvSpPr>
+          <p:cNvPr id="2" name="top rule"/>
+          <p:cNvSpPr/>
+          <p:nvPr/>
+        </p:nvSpPr>
+        <p:spPr>
+          <a:xfrm>
+            <a:off x="0" y="0"/>
+            <a:ext cx="9144000" cy="73152"/>
+          </a:xfrm>
+          <a:prstGeom prst="rect">
+            <a:avLst/>
+          </a:prstGeom>
+          <a:solidFill>
+            <a:srgbClr val="38BDF8"/>
+          </a:solidFill>
+          <a:ln>
+            <a:noFill/>
+          </a:ln>
+        </p:spPr>
+        <p:txBody>
+          <a:bodyPr wrap="square" lIns="182880" tIns="121920" rIns="182880" bIns="121920">
+            <a:normAutofit/>
+          </a:bodyPr>
+          <a:lstStyle/>
+          <a:p>
+            <a:pPr marL="0" indent="0">
+              <a:buNone/>
+            </a:pPr>
+            <a:r>
+              <a:rPr lang="de-DE" sz="100">
+                <a:solidFill>
+                  <a:srgbClr val="38BDF8"/>
+                </a:solidFill>
+                <a:latin typeface="Aptos"/>
+                <a:ea typeface="Aptos"/>
+                <a:cs typeface="Aptos"/>
+              </a:rPr>
+              <a:t/>
+            </a:r>
+          </a:p>
+        </p:txBody>
+      </p:sp>
+      <p:sp>
+        <p:nvSpPr>
+          <p:cNvPr id="3" name="kicker"/>
+          <p:cNvSpPr/>
+          <p:nvPr/>
+        </p:nvSpPr>
+        <p:spPr>
+          <a:xfrm>
+            <a:off x="548640" y="438912"/>
+            <a:ext cx="4200000" cy="300000"/>
+          </a:xfrm>
+          <a:prstGeom prst="rect">
+            <a:avLst/>
+          </a:prstGeom>
+          <a:noFill/>
+          <a:ln>
+            <a:noFill/>
+          </a:ln>
+        </p:spPr>
+        <p:txBody>
+          <a:bodyPr wrap="square" lIns="182880" tIns="121920" rIns="182880" bIns="121920">
+            <a:normAutofit/>
+          </a:bodyPr>
+          <a:lstStyle/>
+          <a:p>
+            <a:pPr marL="0" indent="0">
+              <a:buNone/>
+            </a:pPr>
+            <a:r>
+              <a:rPr lang="de-DE" sz="1350" b="1">
+                <a:solidFill>
+                  <a:srgbClr val="38BDF8"/>
+                </a:solidFill>
+                <a:latin typeface="Aptos"/>
+                <a:ea typeface="Aptos"/>
+                <a:cs typeface="Aptos"/>
+              </a:rPr>
+              <a:t>WEBSITE + REPO</a:t>
+            </a:r>
+          </a:p>
+        </p:txBody>
+      </p:sp>
+      <p:sp>
+        <p:nvSpPr>
+          <p:cNvPr id="4" name="title"/>
+          <p:cNvSpPr/>
+          <p:nvPr/>
+        </p:nvSpPr>
+        <p:spPr>
+          <a:xfrm>
+            <a:off x="548640" y="770000"/>
+            <a:ext cx="8100000" cy="720000"/>
+          </a:xfrm>
+          <a:prstGeom prst="rect">
+            <a:avLst/>
+          </a:prstGeom>
+          <a:noFill/>
+          <a:ln>
+            <a:noFill/>
+          </a:ln>
+        </p:spPr>
+        <p:txBody>
+          <a:bodyPr wrap="square" lIns="182880" tIns="121920" rIns="182880" bIns="121920">
+            <a:normAutofit/>
+          </a:bodyPr>
+          <a:lstStyle/>
+          <a:p>
+            <a:pPr marL="0" indent="0">
+              <a:buNone/>
+            </a:pPr>
+            <a:r>
+              <a:rPr lang="de-DE" sz="3900" b="1">
+                <a:solidFill>
+                  <a:srgbClr val="F8FAFC"/>
+                </a:solidFill>
+                <a:latin typeface="Aptos"/>
+                <a:ea typeface="Aptos"/>
+                <a:cs typeface="Aptos"/>
+              </a:rPr>
+              <a:t>Schaufenster und Beleg</a:t>
+            </a:r>
+          </a:p>
+        </p:txBody>
+      </p:sp>
+      <p:sp>
+        <p:nvSpPr>
+          <p:cNvPr id="5" name="subtitle"/>
+          <p:cNvSpPr/>
+          <p:nvPr/>
+        </p:nvSpPr>
+        <p:spPr>
+          <a:xfrm>
+            <a:off x="548640" y="1510000"/>
+            <a:ext cx="7900000" cy="560000"/>
+          </a:xfrm>
+          <a:prstGeom prst="rect">
+            <a:avLst/>
+          </a:prstGeom>
+          <a:noFill/>
+          <a:ln>
+            <a:noFill/>
+          </a:ln>
+        </p:spPr>
+        <p:txBody>
+          <a:bodyPr wrap="square" lIns="182880" tIns="121920" rIns="182880" bIns="121920">
+            <a:normAutofit/>
+          </a:bodyPr>
+          <a:lstStyle/>
+          <a:p>
+            <a:pPr marL="0" indent="0">
+              <a:buNone/>
+            </a:pPr>
+            <a:r>
+              <a:rPr lang="de-DE" sz="1750">
+                <a:solidFill>
+                  <a:srgbClr val="CBD5E1"/>
+                </a:solidFill>
+                <a:latin typeface="Aptos"/>
+                <a:ea typeface="Aptos"/>
+                <a:cs typeface="Aptos"/>
+              </a:rPr>
+              <a:t>Die Website erklaert die Story. Das Repo zeigt die ausfuehrbaren Materialien.</a:t>
+            </a:r>
+          </a:p>
+        </p:txBody>
+      </p:sp>
+      <p:sp>
+        <p:nvSpPr>
+          <p:cNvPr id="10" name="card 1"/>
+          <p:cNvSpPr/>
+          <p:nvPr/>
+        </p:nvSpPr>
+        <p:spPr>
+          <a:xfrm>
+            <a:off x="548640" y="2320000"/>
+            <a:ext cx="2500000" cy="1540000"/>
+          </a:xfrm>
+          <a:prstGeom prst="roundRect">
+            <a:avLst/>
+          </a:prstGeom>
+          <a:solidFill>
+            <a:srgbClr val="1E293B"/>
+          </a:solidFill>
+          <a:ln w="12700">
+            <a:solidFill>
+              <a:srgbClr val="334155"/>
+            </a:solidFill>
+          </a:ln>
+        </p:spPr>
+        <p:txBody>
+          <a:bodyPr wrap="square" lIns="182880" tIns="121920" rIns="182880" bIns="121920">
+            <a:normAutofit/>
+          </a:bodyPr>
+          <a:lstStyle/>
+          <a:p>
+            <a:pPr marL="0" indent="0">
+              <a:buNone/>
+            </a:pPr>
+            <a:r>
+              <a:rPr lang="de-DE" sz="1850" b="1">
+                <a:solidFill>
+                  <a:srgbClr val="F8FAFC"/>
+                </a:solidFill>
+                <a:latin typeface="Aptos"/>
+                <a:ea typeface="Aptos"/>
+                <a:cs typeface="Aptos"/>
+              </a:rPr>
+              <a:t>Website</a:t>
+            </a:r>
+          </a:p>
+          <a:p>
+            <a:pPr marL="0" indent="0">
+              <a:buNone/>
+            </a:pPr>
+            <a:r>
+              <a:rPr lang="de-DE" sz="1400">
+                <a:solidFill>
+                  <a:srgbClr val="CBD5E1"/>
+                </a:solidFill>
+                <a:latin typeface="Aptos"/>
+                <a:ea typeface="Aptos"/>
+                <a:cs typeface="Aptos"/>
+              </a:rPr>
+              <a:t>kuratierter Ueberblick und Arbeitsprobe: dynamic-dome.com/workshop.</a:t>
+            </a:r>
+          </a:p>
+        </p:txBody>
+      </p:sp>
+      <p:sp>
+        <p:nvSpPr>
+          <p:cNvPr id="11" name="card 2"/>
+          <p:cNvSpPr/>
+          <p:nvPr/>
+        </p:nvSpPr>
+        <p:spPr>
+          <a:xfrm>
+            <a:off x="3308640" y="2320000"/>
+            <a:ext cx="2500000" cy="1540000"/>
+          </a:xfrm>
+          <a:prstGeom prst="roundRect">
+            <a:avLst/>
+          </a:prstGeom>
+          <a:solidFill>
+            <a:srgbClr val="1E293B"/>
+          </a:solidFill>
+          <a:ln w="12700">
+            <a:solidFill>
+              <a:srgbClr val="334155"/>
+            </a:solidFill>
+          </a:ln>
+        </p:spPr>
+        <p:txBody>
+          <a:bodyPr wrap="square" lIns="182880" tIns="121920" rIns="182880" bIns="121920">
+            <a:normAutofit/>
+          </a:bodyPr>
+          <a:lstStyle/>
+          <a:p>
+            <a:pPr marL="0" indent="0">
+              <a:buNone/>
+            </a:pPr>
+            <a:r>
+              <a:rPr lang="de-DE" sz="1850" b="1">
+                <a:solidFill>
+                  <a:srgbClr val="F8FAFC"/>
+                </a:solidFill>
+                <a:latin typeface="Aptos"/>
+                <a:ea typeface="Aptos"/>
+                <a:cs typeface="Aptos"/>
+              </a:rPr>
+              <a:t>Repo</a:t>
+            </a:r>
+          </a:p>
+          <a:p>
+            <a:pPr marL="0" indent="0">
+              <a:buNone/>
+            </a:pPr>
+            <a:r>
+              <a:rPr lang="de-DE" sz="1400">
+                <a:solidFill>
+                  <a:srgbClr val="CBD5E1"/>
+                </a:solidFill>
+                <a:latin typeface="Aptos"/>
+                <a:ea typeface="Aptos"/>
+                <a:cs typeface="Aptos"/>
+              </a:rPr>
+              <a:t>Module, Demos, Exercises, Mentor-Agent und Playground.</a:t>
+            </a:r>
+          </a:p>
+        </p:txBody>
+      </p:sp>
+      <p:sp>
+        <p:nvSpPr>
+          <p:cNvPr id="12" name="card 3"/>
+          <p:cNvSpPr/>
+          <p:nvPr/>
+        </p:nvSpPr>
+        <p:spPr>
+          <a:xfrm>
+            <a:off x="6068640" y="2320000"/>
+            <a:ext cx="2500000" cy="1540000"/>
+          </a:xfrm>
+          <a:prstGeom prst="roundRect">
+            <a:avLst/>
+          </a:prstGeom>
+          <a:solidFill>
+            <a:srgbClr val="1E293B"/>
+          </a:solidFill>
+          <a:ln w="12700">
+            <a:solidFill>
+              <a:srgbClr val="334155"/>
+            </a:solidFill>
+          </a:ln>
+        </p:spPr>
+        <p:txBody>
+          <a:bodyPr wrap="square" lIns="182880" tIns="121920" rIns="182880" bIns="121920">
+            <a:normAutofit/>
+          </a:bodyPr>
+          <a:lstStyle/>
+          <a:p>
+            <a:pPr marL="0" indent="0">
+              <a:buNone/>
+            </a:pPr>
+            <a:r>
+              <a:rPr lang="de-DE" sz="1850" b="1">
+                <a:solidFill>
+                  <a:srgbClr val="F8FAFC"/>
+                </a:solidFill>
+                <a:latin typeface="Aptos"/>
+                <a:ea typeface="Aptos"/>
+                <a:cs typeface="Aptos"/>
+              </a:rPr>
+              <a:t>Reviewer-Pfad</a:t>
+            </a:r>
+          </a:p>
+          <a:p>
+            <a:pPr marL="0" indent="0">
+              <a:buNone/>
+            </a:pPr>
+            <a:r>
+              <a:rPr lang="de-DE" sz="1400">
+                <a:solidFill>
+                  <a:srgbClr val="CBD5E1"/>
+                </a:solidFill>
+                <a:latin typeface="Aptos"/>
+                <a:ea typeface="Aptos"/>
+                <a:cs typeface="Aptos"/>
+              </a:rPr>
+              <a:t>Session-Plan, Module, Demos, Tests, dann Deck.</a:t>
+            </a:r>
+          </a:p>
+        </p:txBody>
+      </p:sp>
+      <p:sp>
+        <p:nvSpPr>
+          <p:cNvPr id="30" name="footer"/>
+          <p:cNvSpPr/>
+          <p:nvPr/>
+        </p:nvSpPr>
+        <p:spPr>
+          <a:xfrm>
+            <a:off x="8050000" y="4700000"/>
+            <a:ext cx="760000" cy="260000"/>
+          </a:xfrm>
+          <a:prstGeom prst="rect">
+            <a:avLst/>
+          </a:prstGeom>
+          <a:noFill/>
+          <a:ln>
+            <a:noFill/>
+          </a:ln>
+        </p:spPr>
+        <p:txBody>
+          <a:bodyPr wrap="square" lIns="182880" tIns="121920" rIns="182880" bIns="121920">
+            <a:normAutofit/>
+          </a:bodyPr>
+          <a:lstStyle/>
+          <a:p>
+            <a:pPr marL="0" indent="0">
+              <a:buNone/>
+            </a:pPr>
+            <a:r>
+              <a:rPr lang="de-DE" sz="1100">
+                <a:solidFill>
+                  <a:srgbClr val="94A3B8"/>
+                </a:solidFill>
+                <a:latin typeface="Aptos"/>
+                <a:ea typeface="Aptos"/>
+                <a:cs typeface="Aptos"/>
+              </a:rPr>
+              <a:t>28 / 30</a:t>
+            </a:r>
           </a:p>
         </p:txBody>
       </p:sp>
@@ -28654,7 +33407,7 @@
                 <a:cs typeface="Calibri"/>
                 <a:sym typeface="Calibri"/>
               </a:rPr>
-              <a:t>3 / 18</a:t>
+              <a:t>3 / 30</a:t>
             </a:r>
             <a:endParaRPr sz="900" b="0" i="0" u="none" strike="noStrike" cap="none">
               <a:solidFill>
@@ -28665,6 +33418,437 @@
               <a:cs typeface="Calibri"/>
               <a:sym typeface="Calibri"/>
             </a:endParaRPr>
+          </a:p>
+        </p:txBody>
+      </p:sp>
+    </p:spTree>
+  </p:cSld>
+  <p:clrMapOvr>
+    <a:masterClrMapping/>
+  </p:clrMapOvr>
+</p:sld>
+</file>
+
+<file path=ppt/slides/slide30.xml><?xml version="1.0" encoding="utf-8"?>
+<p:sld xmlns:a="http://schemas.openxmlformats.org/drawingml/2006/main" xmlns:r="http://schemas.openxmlformats.org/officeDocument/2006/relationships" xmlns:p="http://schemas.openxmlformats.org/presentationml/2006/main">
+  <p:cSld>
+    <p:bg>
+      <p:bgPr>
+        <a:solidFill>
+          <a:srgbClr val="0F172A"/>
+        </a:solidFill>
+        <a:effectLst/>
+      </p:bgPr>
+    </p:bg>
+    <p:spTree>
+      <p:nvGrpSpPr>
+        <p:cNvPr id="1" name="Group 1"/>
+        <p:cNvGrpSpPr/>
+        <p:nvPr/>
+      </p:nvGrpSpPr>
+      <p:grpSpPr>
+        <a:xfrm>
+          <a:off x="0" y="0"/>
+          <a:ext cx="0" cy="0"/>
+          <a:chOff x="0" y="0"/>
+          <a:chExt cx="0" cy="0"/>
+        </a:xfrm>
+      </p:grpSpPr>
+      <p:sp>
+        <p:nvSpPr>
+          <p:cNvPr id="2" name="top rule"/>
+          <p:cNvSpPr/>
+          <p:nvPr/>
+        </p:nvSpPr>
+        <p:spPr>
+          <a:xfrm>
+            <a:off x="0" y="0"/>
+            <a:ext cx="9144000" cy="73152"/>
+          </a:xfrm>
+          <a:prstGeom prst="rect">
+            <a:avLst/>
+          </a:prstGeom>
+          <a:solidFill>
+            <a:srgbClr val="38BDF8"/>
+          </a:solidFill>
+          <a:ln>
+            <a:noFill/>
+          </a:ln>
+        </p:spPr>
+        <p:txBody>
+          <a:bodyPr wrap="square" lIns="182880" tIns="121920" rIns="182880" bIns="121920">
+            <a:normAutofit/>
+          </a:bodyPr>
+          <a:lstStyle/>
+          <a:p>
+            <a:pPr marL="0" indent="0">
+              <a:buNone/>
+            </a:pPr>
+            <a:r>
+              <a:rPr lang="de-DE" sz="100">
+                <a:solidFill>
+                  <a:srgbClr val="38BDF8"/>
+                </a:solidFill>
+                <a:latin typeface="Aptos"/>
+                <a:ea typeface="Aptos"/>
+                <a:cs typeface="Aptos"/>
+              </a:rPr>
+              <a:t/>
+            </a:r>
+          </a:p>
+        </p:txBody>
+      </p:sp>
+      <p:sp>
+        <p:nvSpPr>
+          <p:cNvPr id="3" name="kicker"/>
+          <p:cNvSpPr/>
+          <p:nvPr/>
+        </p:nvSpPr>
+        <p:spPr>
+          <a:xfrm>
+            <a:off x="548640" y="438912"/>
+            <a:ext cx="4200000" cy="300000"/>
+          </a:xfrm>
+          <a:prstGeom prst="rect">
+            <a:avLst/>
+          </a:prstGeom>
+          <a:noFill/>
+          <a:ln>
+            <a:noFill/>
+          </a:ln>
+        </p:spPr>
+        <p:txBody>
+          <a:bodyPr wrap="square" lIns="182880" tIns="121920" rIns="182880" bIns="121920">
+            <a:normAutofit/>
+          </a:bodyPr>
+          <a:lstStyle/>
+          <a:p>
+            <a:pPr marL="0" indent="0">
+              <a:buNone/>
+            </a:pPr>
+            <a:r>
+              <a:rPr lang="de-DE" sz="1350" b="1">
+                <a:solidFill>
+                  <a:srgbClr val="38BDF8"/>
+                </a:solidFill>
+                <a:latin typeface="Aptos"/>
+                <a:ea typeface="Aptos"/>
+                <a:cs typeface="Aptos"/>
+              </a:rPr>
+              <a:t>DRY RUN CHECKLIST</a:t>
+            </a:r>
+          </a:p>
+        </p:txBody>
+      </p:sp>
+      <p:sp>
+        <p:nvSpPr>
+          <p:cNvPr id="4" name="title"/>
+          <p:cNvSpPr/>
+          <p:nvPr/>
+        </p:nvSpPr>
+        <p:spPr>
+          <a:xfrm>
+            <a:off x="548640" y="770000"/>
+            <a:ext cx="8100000" cy="720000"/>
+          </a:xfrm>
+          <a:prstGeom prst="rect">
+            <a:avLst/>
+          </a:prstGeom>
+          <a:noFill/>
+          <a:ln>
+            <a:noFill/>
+          </a:ln>
+        </p:spPr>
+        <p:txBody>
+          <a:bodyPr wrap="square" lIns="182880" tIns="121920" rIns="182880" bIns="121920">
+            <a:normAutofit/>
+          </a:bodyPr>
+          <a:lstStyle/>
+          <a:p>
+            <a:pPr marL="0" indent="0">
+              <a:buNone/>
+            </a:pPr>
+            <a:r>
+              <a:rPr lang="de-DE" sz="3900" b="1">
+                <a:solidFill>
+                  <a:srgbClr val="F8FAFC"/>
+                </a:solidFill>
+                <a:latin typeface="Aptos"/>
+                <a:ea typeface="Aptos"/>
+                <a:cs typeface="Aptos"/>
+              </a:rPr>
+              <a:t>Vor Session 2/3 pruefen</a:t>
+            </a:r>
+          </a:p>
+        </p:txBody>
+      </p:sp>
+      <p:sp>
+        <p:nvSpPr>
+          <p:cNvPr id="5" name="subtitle"/>
+          <p:cNvSpPr/>
+          <p:nvPr/>
+        </p:nvSpPr>
+        <p:spPr>
+          <a:xfrm>
+            <a:off x="548640" y="1510000"/>
+            <a:ext cx="7900000" cy="560000"/>
+          </a:xfrm>
+          <a:prstGeom prst="rect">
+            <a:avLst/>
+          </a:prstGeom>
+          <a:noFill/>
+          <a:ln>
+            <a:noFill/>
+          </a:ln>
+        </p:spPr>
+        <p:txBody>
+          <a:bodyPr wrap="square" lIns="182880" tIns="121920" rIns="182880" bIns="121920">
+            <a:normAutofit/>
+          </a:bodyPr>
+          <a:lstStyle/>
+          <a:p>
+            <a:pPr marL="0" indent="0">
+              <a:buNone/>
+            </a:pPr>
+            <a:r>
+              <a:rPr lang="de-DE" sz="1750">
+                <a:solidFill>
+                  <a:srgbClr val="CBD5E1"/>
+                </a:solidFill>
+                <a:latin typeface="Aptos"/>
+                <a:ea typeface="Aptos"/>
+                <a:cs typeface="Aptos"/>
+              </a:rPr>
+              <a:t>Ein guter Live-Workshop scheitert nicht an Setup-Drift.</a:t>
+            </a:r>
+          </a:p>
+        </p:txBody>
+      </p:sp>
+      <p:sp>
+        <p:nvSpPr>
+          <p:cNvPr id="10" name="card 1"/>
+          <p:cNvSpPr/>
+          <p:nvPr/>
+        </p:nvSpPr>
+        <p:spPr>
+          <a:xfrm>
+            <a:off x="548640" y="2320000"/>
+            <a:ext cx="2500000" cy="1540000"/>
+          </a:xfrm>
+          <a:prstGeom prst="roundRect">
+            <a:avLst/>
+          </a:prstGeom>
+          <a:solidFill>
+            <a:srgbClr val="1E293B"/>
+          </a:solidFill>
+          <a:ln w="12700">
+            <a:solidFill>
+              <a:srgbClr val="334155"/>
+            </a:solidFill>
+          </a:ln>
+        </p:spPr>
+        <p:txBody>
+          <a:bodyPr wrap="square" lIns="182880" tIns="121920" rIns="182880" bIns="121920">
+            <a:normAutofit/>
+          </a:bodyPr>
+          <a:lstStyle/>
+          <a:p>
+            <a:pPr marL="0" indent="0">
+              <a:buNone/>
+            </a:pPr>
+            <a:r>
+              <a:rPr lang="de-DE" sz="1850" b="1">
+                <a:solidFill>
+                  <a:srgbClr val="F8FAFC"/>
+                </a:solidFill>
+                <a:latin typeface="Aptos"/>
+                <a:ea typeface="Aptos"/>
+                <a:cs typeface="Aptos"/>
+              </a:rPr>
+              <a:t>Deck</a:t>
+            </a:r>
+          </a:p>
+          <a:p>
+            <a:pPr marL="0" indent="0">
+              <a:buNone/>
+            </a:pPr>
+            <a:r>
+              <a:rPr lang="de-DE" sz="1400">
+                <a:solidFill>
+                  <a:srgbClr val="CBD5E1"/>
+                </a:solidFill>
+                <a:latin typeface="Aptos"/>
+                <a:ea typeface="Aptos"/>
+                <a:cs typeface="Aptos"/>
+              </a:rPr>
+              <a:t>visueller Einstieg deckt 17 Module ab.</a:t>
+            </a:r>
+          </a:p>
+        </p:txBody>
+      </p:sp>
+      <p:sp>
+        <p:nvSpPr>
+          <p:cNvPr id="11" name="card 2"/>
+          <p:cNvSpPr/>
+          <p:nvPr/>
+        </p:nvSpPr>
+        <p:spPr>
+          <a:xfrm>
+            <a:off x="3308640" y="2320000"/>
+            <a:ext cx="2500000" cy="1540000"/>
+          </a:xfrm>
+          <a:prstGeom prst="roundRect">
+            <a:avLst/>
+          </a:prstGeom>
+          <a:solidFill>
+            <a:srgbClr val="1E293B"/>
+          </a:solidFill>
+          <a:ln w="12700">
+            <a:solidFill>
+              <a:srgbClr val="334155"/>
+            </a:solidFill>
+          </a:ln>
+        </p:spPr>
+        <p:txBody>
+          <a:bodyPr wrap="square" lIns="182880" tIns="121920" rIns="182880" bIns="121920">
+            <a:normAutofit/>
+          </a:bodyPr>
+          <a:lstStyle/>
+          <a:p>
+            <a:pPr marL="0" indent="0">
+              <a:buNone/>
+            </a:pPr>
+            <a:r>
+              <a:rPr lang="de-DE" sz="1850" b="1">
+                <a:solidFill>
+                  <a:srgbClr val="F8FAFC"/>
+                </a:solidFill>
+                <a:latin typeface="Aptos"/>
+                <a:ea typeface="Aptos"/>
+                <a:cs typeface="Aptos"/>
+              </a:rPr>
+              <a:t>Demos</a:t>
+            </a:r>
+          </a:p>
+          <a:p>
+            <a:pPr marL="0" indent="0">
+              <a:buNone/>
+            </a:pPr>
+            <a:r>
+              <a:rPr lang="de-DE" sz="1400">
+                <a:solidFill>
+                  <a:srgbClr val="CBD5E1"/>
+                </a:solidFill>
+                <a:latin typeface="Aptos"/>
+                <a:ea typeface="Aptos"/>
+                <a:cs typeface="Aptos"/>
+              </a:rPr>
+              <a:t>je Session mindestens 2 Must-Do-Demos einmal live durchspielen.</a:t>
+            </a:r>
+          </a:p>
+        </p:txBody>
+      </p:sp>
+      <p:sp>
+        <p:nvSpPr>
+          <p:cNvPr id="12" name="card 3"/>
+          <p:cNvSpPr/>
+          <p:nvPr/>
+        </p:nvSpPr>
+        <p:spPr>
+          <a:xfrm>
+            <a:off x="6068640" y="2320000"/>
+            <a:ext cx="2500000" cy="1540000"/>
+          </a:xfrm>
+          <a:prstGeom prst="roundRect">
+            <a:avLst/>
+          </a:prstGeom>
+          <a:solidFill>
+            <a:srgbClr val="1E293B"/>
+          </a:solidFill>
+          <a:ln w="12700">
+            <a:solidFill>
+              <a:srgbClr val="334155"/>
+            </a:solidFill>
+          </a:ln>
+        </p:spPr>
+        <p:txBody>
+          <a:bodyPr wrap="square" lIns="182880" tIns="121920" rIns="182880" bIns="121920">
+            <a:normAutofit/>
+          </a:bodyPr>
+          <a:lstStyle/>
+          <a:p>
+            <a:pPr marL="0" indent="0">
+              <a:buNone/>
+            </a:pPr>
+            <a:r>
+              <a:rPr lang="de-DE" sz="1850" b="1">
+                <a:solidFill>
+                  <a:srgbClr val="F8FAFC"/>
+                </a:solidFill>
+                <a:latin typeface="Aptos"/>
+                <a:ea typeface="Aptos"/>
+                <a:cs typeface="Aptos"/>
+              </a:rPr>
+              <a:t>Fallbacks</a:t>
+            </a:r>
+          </a:p>
+          <a:p>
+            <a:pPr marL="0" indent="0">
+              <a:buNone/>
+            </a:pPr>
+            <a:r>
+              <a:rPr lang="de-DE" sz="1400">
+                <a:solidFill>
+                  <a:srgbClr val="CBD5E1"/>
+                </a:solidFill>
+                <a:latin typeface="Aptos"/>
+                <a:ea typeface="Aptos"/>
+                <a:cs typeface="Aptos"/>
+              </a:rPr>
+              <a:t>Recovery Notes, offline Pfade und Budget-Caps vorbereitet.</a:t>
+            </a:r>
+          </a:p>
+        </p:txBody>
+      </p:sp>
+      <p:sp>
+        <p:nvSpPr>
+          <p:cNvPr id="30" name="footer"/>
+          <p:cNvSpPr/>
+          <p:nvPr/>
+        </p:nvSpPr>
+        <p:spPr>
+          <a:xfrm>
+            <a:off x="8050000" y="4700000"/>
+            <a:ext cx="760000" cy="260000"/>
+          </a:xfrm>
+          <a:prstGeom prst="rect">
+            <a:avLst/>
+          </a:prstGeom>
+          <a:noFill/>
+          <a:ln>
+            <a:noFill/>
+          </a:ln>
+        </p:spPr>
+        <p:txBody>
+          <a:bodyPr wrap="square" lIns="182880" tIns="121920" rIns="182880" bIns="121920">
+            <a:normAutofit/>
+          </a:bodyPr>
+          <a:lstStyle/>
+          <a:p>
+            <a:pPr marL="0" indent="0">
+              <a:buNone/>
+            </a:pPr>
+            <a:r>
+              <a:rPr lang="de-DE" sz="1100">
+                <a:solidFill>
+                  <a:srgbClr val="94A3B8"/>
+                </a:solidFill>
+                <a:latin typeface="Aptos"/>
+                <a:ea typeface="Aptos"/>
+                <a:cs typeface="Aptos"/>
+              </a:rPr>
+              <a:t>29 / 30</a:t>
+            </a:r>
           </a:p>
         </p:txBody>
       </p:sp>
@@ -30484,7 +35668,7 @@
                 <a:cs typeface="Calibri"/>
                 <a:sym typeface="Calibri"/>
               </a:rPr>
-              <a:t>4 / 18</a:t>
+              <a:t>4 / 30</a:t>
             </a:r>
             <a:endParaRPr sz="900" b="0" i="0" u="none" strike="noStrike" cap="none">
               <a:solidFill>
@@ -33546,7 +38730,7 @@
                 <a:cs typeface="Calibri"/>
                 <a:sym typeface="Calibri"/>
               </a:rPr>
-              <a:t>5 / 18</a:t>
+              <a:t>5 / 30</a:t>
             </a:r>
             <a:endParaRPr sz="900" b="0" i="0" u="none" strike="noStrike" cap="none">
               <a:solidFill>
@@ -35623,7 +40807,7 @@
                 <a:cs typeface="Calibri"/>
                 <a:sym typeface="Calibri"/>
               </a:rPr>
-              <a:t>6 / 18</a:t>
+              <a:t>6 / 30</a:t>
             </a:r>
             <a:endParaRPr sz="900" b="0" i="0" u="none" strike="noStrike" cap="none">
               <a:solidFill>
@@ -37411,7 +42595,7 @@
                 <a:cs typeface="Calibri"/>
                 <a:sym typeface="Calibri"/>
               </a:rPr>
-              <a:t>7 / 18</a:t>
+              <a:t>7 / 30</a:t>
             </a:r>
             <a:endParaRPr sz="900" b="0" i="0" u="none" strike="noStrike" cap="none">
               <a:solidFill>
@@ -39393,7 +44577,7 @@
                 <a:cs typeface="Calibri"/>
                 <a:sym typeface="Calibri"/>
               </a:rPr>
-              <a:t>8 / 18</a:t>
+              <a:t>8 / 30</a:t>
             </a:r>
             <a:endParaRPr sz="900" b="0" i="0" u="none" strike="noStrike" cap="none">
               <a:solidFill>
@@ -41212,7 +46396,7 @@
                 <a:cs typeface="Calibri"/>
                 <a:sym typeface="Calibri"/>
               </a:rPr>
-              <a:t>9 / 18</a:t>
+              <a:t>9 / 30</a:t>
             </a:r>
             <a:endParaRPr sz="900" b="0" i="0" u="none" strike="noStrike" cap="none">
               <a:solidFill>
